--- a/courses/tom-economics/lessons/lesson-06/slides.pptx
+++ b/courses/tom-economics/lessons/lesson-06/slides.pptx
@@ -20,9 +20,13 @@
     <p:sldId id="268" r:id="rId14"/>
     <p:sldId id="269" r:id="rId15"/>
     <p:sldId id="270" r:id="rId16"/>
+    <p:sldId id="271" r:id="rId17"/>
+    <p:sldId id="272" r:id="rId18"/>
+    <p:sldId id="273" r:id="rId19"/>
+    <p:sldId id="274" r:id="rId20"/>
   </p:sldIdLst>
   <p:notesMasterIdLst>
-    <p:notesMasterId r:id="rId17"/>
+    <p:notesMasterId r:id="rId21"/>
   </p:notesMasterIdLst>
   <p:sldSz cx="12192000" cy="6858000"/>
   <p:notesSz cx="6858000" cy="12192000"/>
@@ -1068,6 +1072,358 @@
             <a:fld id="{F7021451-1387-4CA6-816F-3879F97B5CBC}" type="slidenum">
               <a:rPr lang="en-US"/>
               <a:t>15</a:t>
+            </a:fld>
+            <a:endParaRPr lang="en-US"/>
+          </a:p>
+        </p:txBody>
+      </p:sp>
+    </p:spTree>
+    <p:extLst>
+      <p:ext uri="{BB962C8B-B14F-4D97-AF65-F5344CB8AC3E}">
+        <p14:creationId xmlns:p14="http://schemas.microsoft.com/office/powerpoint/2010/main" val="1024086991"/>
+      </p:ext>
+    </p:extLst>
+  </p:cSld>
+  <p:clrMapOvr>
+    <a:masterClrMapping/>
+  </p:clrMapOvr>
+</p:notes>
+</file>
+
+<file path=ppt/notesSlides/notesSlide16.xml><?xml version="1.0" encoding="utf-8"?>
+<p:notes xmlns:a="http://schemas.openxmlformats.org/drawingml/2006/main" xmlns:r="http://schemas.openxmlformats.org/officeDocument/2006/relationships" xmlns:p="http://schemas.openxmlformats.org/presentationml/2006/main">
+  <p:cSld>
+    <p:spTree>
+      <p:nvGrpSpPr>
+        <p:cNvPr id="1" name=""/>
+        <p:cNvGrpSpPr/>
+        <p:nvPr/>
+      </p:nvGrpSpPr>
+      <p:grpSpPr>
+        <a:xfrm>
+          <a:off x="0" y="0"/>
+          <a:ext cx="0" cy="0"/>
+          <a:chOff x="0" y="0"/>
+          <a:chExt cx="0" cy="0"/>
+        </a:xfrm>
+      </p:grpSpPr>
+      <p:sp>
+        <p:nvSpPr>
+          <p:cNvPr id="2" name="Slide Image Placeholder 1"/>
+          <p:cNvSpPr>
+            <a:spLocks noGrp="1" noRot="1" noChangeAspect="1"/>
+          </p:cNvSpPr>
+          <p:nvPr>
+            <p:ph type="sldImg"/>
+          </p:nvPr>
+        </p:nvSpPr>
+        <p:spPr/>
+      </p:sp>
+      <p:sp>
+        <p:nvSpPr>
+          <p:cNvPr id="3" name="Notes Placeholder 2"/>
+          <p:cNvSpPr>
+            <a:spLocks noGrp="1"/>
+          </p:cNvSpPr>
+          <p:nvPr>
+            <p:ph type="body" idx="1"/>
+          </p:nvPr>
+        </p:nvSpPr>
+        <p:spPr/>
+        <p:txBody>
+          <a:bodyPr/>
+          <a:lstStyle/>
+          <a:p>
+            <a:r>
+              <a:rPr lang="en-US" dirty="0"/>
+              <a:t/>
+            </a:r>
+            <a:endParaRPr lang="en-US" dirty="0"/>
+          </a:p>
+        </p:txBody>
+      </p:sp>
+      <p:sp>
+        <p:nvSpPr>
+          <p:cNvPr id="4" name="Slide Number Placeholder 3"/>
+          <p:cNvSpPr>
+            <a:spLocks noGrp="1"/>
+          </p:cNvSpPr>
+          <p:nvPr>
+            <p:ph type="sldNum" sz="quarter" idx="10"/>
+          </p:nvPr>
+        </p:nvSpPr>
+        <p:spPr/>
+        <p:txBody>
+          <a:bodyPr/>
+          <a:lstStyle/>
+          <a:p>
+            <a:fld id="{F7021451-1387-4CA6-816F-3879F97B5CBC}" type="slidenum">
+              <a:rPr lang="en-US"/>
+              <a:t>16</a:t>
+            </a:fld>
+            <a:endParaRPr lang="en-US"/>
+          </a:p>
+        </p:txBody>
+      </p:sp>
+    </p:spTree>
+    <p:extLst>
+      <p:ext uri="{BB962C8B-B14F-4D97-AF65-F5344CB8AC3E}">
+        <p14:creationId xmlns:p14="http://schemas.microsoft.com/office/powerpoint/2010/main" val="1024086991"/>
+      </p:ext>
+    </p:extLst>
+  </p:cSld>
+  <p:clrMapOvr>
+    <a:masterClrMapping/>
+  </p:clrMapOvr>
+</p:notes>
+</file>
+
+<file path=ppt/notesSlides/notesSlide17.xml><?xml version="1.0" encoding="utf-8"?>
+<p:notes xmlns:a="http://schemas.openxmlformats.org/drawingml/2006/main" xmlns:r="http://schemas.openxmlformats.org/officeDocument/2006/relationships" xmlns:p="http://schemas.openxmlformats.org/presentationml/2006/main">
+  <p:cSld>
+    <p:spTree>
+      <p:nvGrpSpPr>
+        <p:cNvPr id="1" name=""/>
+        <p:cNvGrpSpPr/>
+        <p:nvPr/>
+      </p:nvGrpSpPr>
+      <p:grpSpPr>
+        <a:xfrm>
+          <a:off x="0" y="0"/>
+          <a:ext cx="0" cy="0"/>
+          <a:chOff x="0" y="0"/>
+          <a:chExt cx="0" cy="0"/>
+        </a:xfrm>
+      </p:grpSpPr>
+      <p:sp>
+        <p:nvSpPr>
+          <p:cNvPr id="2" name="Slide Image Placeholder 1"/>
+          <p:cNvSpPr>
+            <a:spLocks noGrp="1" noRot="1" noChangeAspect="1"/>
+          </p:cNvSpPr>
+          <p:nvPr>
+            <p:ph type="sldImg"/>
+          </p:nvPr>
+        </p:nvSpPr>
+        <p:spPr/>
+      </p:sp>
+      <p:sp>
+        <p:nvSpPr>
+          <p:cNvPr id="3" name="Notes Placeholder 2"/>
+          <p:cNvSpPr>
+            <a:spLocks noGrp="1"/>
+          </p:cNvSpPr>
+          <p:nvPr>
+            <p:ph type="body" idx="1"/>
+          </p:nvPr>
+        </p:nvSpPr>
+        <p:spPr/>
+        <p:txBody>
+          <a:bodyPr/>
+          <a:lstStyle/>
+          <a:p>
+            <a:r>
+              <a:rPr lang="en-US" dirty="0"/>
+              <a:t/>
+            </a:r>
+            <a:endParaRPr lang="en-US" dirty="0"/>
+          </a:p>
+        </p:txBody>
+      </p:sp>
+      <p:sp>
+        <p:nvSpPr>
+          <p:cNvPr id="4" name="Slide Number Placeholder 3"/>
+          <p:cNvSpPr>
+            <a:spLocks noGrp="1"/>
+          </p:cNvSpPr>
+          <p:nvPr>
+            <p:ph type="sldNum" sz="quarter" idx="10"/>
+          </p:nvPr>
+        </p:nvSpPr>
+        <p:spPr/>
+        <p:txBody>
+          <a:bodyPr/>
+          <a:lstStyle/>
+          <a:p>
+            <a:fld id="{F7021451-1387-4CA6-816F-3879F97B5CBC}" type="slidenum">
+              <a:rPr lang="en-US"/>
+              <a:t>17</a:t>
+            </a:fld>
+            <a:endParaRPr lang="en-US"/>
+          </a:p>
+        </p:txBody>
+      </p:sp>
+    </p:spTree>
+    <p:extLst>
+      <p:ext uri="{BB962C8B-B14F-4D97-AF65-F5344CB8AC3E}">
+        <p14:creationId xmlns:p14="http://schemas.microsoft.com/office/powerpoint/2010/main" val="1024086991"/>
+      </p:ext>
+    </p:extLst>
+  </p:cSld>
+  <p:clrMapOvr>
+    <a:masterClrMapping/>
+  </p:clrMapOvr>
+</p:notes>
+</file>
+
+<file path=ppt/notesSlides/notesSlide18.xml><?xml version="1.0" encoding="utf-8"?>
+<p:notes xmlns:a="http://schemas.openxmlformats.org/drawingml/2006/main" xmlns:r="http://schemas.openxmlformats.org/officeDocument/2006/relationships" xmlns:p="http://schemas.openxmlformats.org/presentationml/2006/main">
+  <p:cSld>
+    <p:spTree>
+      <p:nvGrpSpPr>
+        <p:cNvPr id="1" name=""/>
+        <p:cNvGrpSpPr/>
+        <p:nvPr/>
+      </p:nvGrpSpPr>
+      <p:grpSpPr>
+        <a:xfrm>
+          <a:off x="0" y="0"/>
+          <a:ext cx="0" cy="0"/>
+          <a:chOff x="0" y="0"/>
+          <a:chExt cx="0" cy="0"/>
+        </a:xfrm>
+      </p:grpSpPr>
+      <p:sp>
+        <p:nvSpPr>
+          <p:cNvPr id="2" name="Slide Image Placeholder 1"/>
+          <p:cNvSpPr>
+            <a:spLocks noGrp="1" noRot="1" noChangeAspect="1"/>
+          </p:cNvSpPr>
+          <p:nvPr>
+            <p:ph type="sldImg"/>
+          </p:nvPr>
+        </p:nvSpPr>
+        <p:spPr/>
+      </p:sp>
+      <p:sp>
+        <p:nvSpPr>
+          <p:cNvPr id="3" name="Notes Placeholder 2"/>
+          <p:cNvSpPr>
+            <a:spLocks noGrp="1"/>
+          </p:cNvSpPr>
+          <p:nvPr>
+            <p:ph type="body" idx="1"/>
+          </p:nvPr>
+        </p:nvSpPr>
+        <p:spPr/>
+        <p:txBody>
+          <a:bodyPr/>
+          <a:lstStyle/>
+          <a:p>
+            <a:r>
+              <a:rPr lang="en-US" dirty="0"/>
+              <a:t/>
+            </a:r>
+            <a:endParaRPr lang="en-US" dirty="0"/>
+          </a:p>
+        </p:txBody>
+      </p:sp>
+      <p:sp>
+        <p:nvSpPr>
+          <p:cNvPr id="4" name="Slide Number Placeholder 3"/>
+          <p:cNvSpPr>
+            <a:spLocks noGrp="1"/>
+          </p:cNvSpPr>
+          <p:nvPr>
+            <p:ph type="sldNum" sz="quarter" idx="10"/>
+          </p:nvPr>
+        </p:nvSpPr>
+        <p:spPr/>
+        <p:txBody>
+          <a:bodyPr/>
+          <a:lstStyle/>
+          <a:p>
+            <a:fld id="{F7021451-1387-4CA6-816F-3879F97B5CBC}" type="slidenum">
+              <a:rPr lang="en-US"/>
+              <a:t>18</a:t>
+            </a:fld>
+            <a:endParaRPr lang="en-US"/>
+          </a:p>
+        </p:txBody>
+      </p:sp>
+    </p:spTree>
+    <p:extLst>
+      <p:ext uri="{BB962C8B-B14F-4D97-AF65-F5344CB8AC3E}">
+        <p14:creationId xmlns:p14="http://schemas.microsoft.com/office/powerpoint/2010/main" val="1024086991"/>
+      </p:ext>
+    </p:extLst>
+  </p:cSld>
+  <p:clrMapOvr>
+    <a:masterClrMapping/>
+  </p:clrMapOvr>
+</p:notes>
+</file>
+
+<file path=ppt/notesSlides/notesSlide19.xml><?xml version="1.0" encoding="utf-8"?>
+<p:notes xmlns:a="http://schemas.openxmlformats.org/drawingml/2006/main" xmlns:r="http://schemas.openxmlformats.org/officeDocument/2006/relationships" xmlns:p="http://schemas.openxmlformats.org/presentationml/2006/main">
+  <p:cSld>
+    <p:spTree>
+      <p:nvGrpSpPr>
+        <p:cNvPr id="1" name=""/>
+        <p:cNvGrpSpPr/>
+        <p:nvPr/>
+      </p:nvGrpSpPr>
+      <p:grpSpPr>
+        <a:xfrm>
+          <a:off x="0" y="0"/>
+          <a:ext cx="0" cy="0"/>
+          <a:chOff x="0" y="0"/>
+          <a:chExt cx="0" cy="0"/>
+        </a:xfrm>
+      </p:grpSpPr>
+      <p:sp>
+        <p:nvSpPr>
+          <p:cNvPr id="2" name="Slide Image Placeholder 1"/>
+          <p:cNvSpPr>
+            <a:spLocks noGrp="1" noRot="1" noChangeAspect="1"/>
+          </p:cNvSpPr>
+          <p:nvPr>
+            <p:ph type="sldImg"/>
+          </p:nvPr>
+        </p:nvSpPr>
+        <p:spPr/>
+      </p:sp>
+      <p:sp>
+        <p:nvSpPr>
+          <p:cNvPr id="3" name="Notes Placeholder 2"/>
+          <p:cNvSpPr>
+            <a:spLocks noGrp="1"/>
+          </p:cNvSpPr>
+          <p:nvPr>
+            <p:ph type="body" idx="1"/>
+          </p:nvPr>
+        </p:nvSpPr>
+        <p:spPr/>
+        <p:txBody>
+          <a:bodyPr/>
+          <a:lstStyle/>
+          <a:p>
+            <a:r>
+              <a:rPr lang="en-US" dirty="0"/>
+              <a:t/>
+            </a:r>
+            <a:endParaRPr lang="en-US" dirty="0"/>
+          </a:p>
+        </p:txBody>
+      </p:sp>
+      <p:sp>
+        <p:nvSpPr>
+          <p:cNvPr id="4" name="Slide Number Placeholder 3"/>
+          <p:cNvSpPr>
+            <a:spLocks noGrp="1"/>
+          </p:cNvSpPr>
+          <p:nvPr>
+            <p:ph type="sldNum" sz="quarter" idx="10"/>
+          </p:nvPr>
+        </p:nvSpPr>
+        <p:spPr/>
+        <p:txBody>
+          <a:bodyPr/>
+          <a:lstStyle/>
+          <a:p>
+            <a:fld id="{F7021451-1387-4CA6-816F-3879F97B5CBC}" type="slidenum">
+              <a:rPr lang="en-US"/>
+              <a:t>19</a:t>
             </a:fld>
             <a:endParaRPr lang="en-US"/>
           </a:p>
@@ -2278,7 +2634,7 @@
         </p:nvSpPr>
         <p:spPr>
           <a:xfrm>
-            <a:off x="640080" y="502920"/>
+            <a:off x="640080" y="548640"/>
             <a:ext cx="10881360" cy="731520"/>
           </a:xfrm>
           <a:prstGeom prst="rect">
@@ -2303,7 +2659,7 @@
                 <a:ea typeface="Cambria" pitchFamily="34" charset="-122"/>
                 <a:cs typeface="Cambria" pitchFamily="34" charset="-120"/>
               </a:rPr>
-              <a:t>Advantages in action</a:t>
+              <a:t>Characteristics of a market economy (1/2)</a:t>
             </a:r>
             <a:endParaRPr lang="en-US" sz="3000" dirty="0"/>
           </a:p>
@@ -2317,12 +2673,12 @@
         </p:nvSpPr>
         <p:spPr>
           <a:xfrm>
-            <a:off x="640080" y="1554480"/>
-            <a:ext cx="5212080" cy="3931920"/>
+            <a:off x="790956" y="1828800"/>
+            <a:ext cx="3291840" cy="3108960"/>
           </a:xfrm>
           <a:prstGeom prst="roundRect">
             <a:avLst>
-              <a:gd name="adj" fmla="val 2791"/>
+              <a:gd name="adj" fmla="val 3529"/>
             </a:avLst>
           </a:prstGeom>
           <a:solidFill>
@@ -2339,8 +2695,8 @@
         </p:nvSpPr>
         <p:spPr>
           <a:xfrm>
-            <a:off x="914400" y="1783080"/>
-            <a:ext cx="4663440" cy="457200"/>
+            <a:off x="1065276" y="2103120"/>
+            <a:ext cx="2743200" cy="548640"/>
           </a:xfrm>
           <a:prstGeom prst="rect">
             <a:avLst/>
@@ -2356,17 +2712,17 @@
               <a:buNone/>
             </a:pPr>
             <a:r>
-              <a:rPr lang="en-US" sz="1800" b="1" dirty="0">
-                <a:solidFill>
-                  <a:srgbClr val="F96167"/>
-                </a:solidFill>
-                <a:latin typeface="Calibri" pitchFamily="34" charset="0"/>
-                <a:ea typeface="Calibri" pitchFamily="34" charset="-122"/>
-                <a:cs typeface="Calibri" pitchFamily="34" charset="-120"/>
-              </a:rPr>
-              <a:t>Efficiency &amp; choice</a:t>
-            </a:r>
-            <a:endParaRPr lang="en-US" sz="1800" dirty="0"/>
+              <a:rPr lang="en-US" sz="1600" b="1" dirty="0">
+                <a:solidFill>
+                  <a:srgbClr val="1E2761"/>
+                </a:solidFill>
+                <a:latin typeface="Calibri" pitchFamily="34" charset="0"/>
+                <a:ea typeface="Calibri" pitchFamily="34" charset="-122"/>
+                <a:cs typeface="Calibri" pitchFamily="34" charset="-120"/>
+              </a:rPr>
+              <a:t>Private ownership</a:t>
+            </a:r>
+            <a:endParaRPr lang="en-US" sz="1600" dirty="0"/>
           </a:p>
         </p:txBody>
       </p:sp>
@@ -2378,8 +2734,8 @@
         </p:nvSpPr>
         <p:spPr>
           <a:xfrm>
-            <a:off x="914400" y="2286000"/>
-            <a:ext cx="4663440" cy="3017520"/>
+            <a:off x="1065276" y="2697480"/>
+            <a:ext cx="2743200" cy="2011680"/>
           </a:xfrm>
           <a:prstGeom prst="rect">
             <a:avLst/>
@@ -2393,12 +2749,12 @@
           <a:p>
             <a:pPr indent="0" marL="0">
               <a:lnSpc>
-                <a:spcPct val="130000"/>
+                <a:spcPct val="125000"/>
               </a:lnSpc>
               <a:buNone/>
             </a:pPr>
             <a:r>
-              <a:rPr lang="en-US" sz="1500" dirty="0">
+              <a:rPr lang="en-US" sz="1250" dirty="0">
                 <a:solidFill>
                   <a:srgbClr val="1A1A1A"/>
                 </a:solidFill>
@@ -2406,38 +2762,9 @@
                 <a:ea typeface="Calibri" pitchFamily="34" charset="-122"/>
                 <a:cs typeface="Calibri" pitchFamily="34" charset="-120"/>
               </a:rPr>
-              <a:t>Three 3D-print shops open near the padel club, all competing for Tom's customers.</a:t>
-            </a:r>
-            <a:endParaRPr lang="en-US" sz="1500" dirty="0"/>
-          </a:p>
-          <a:p>
-            <a:pPr indent="0" marL="0">
-              <a:lnSpc>
-                <a:spcPct val="130000"/>
-              </a:lnSpc>
-              <a:buNone/>
-            </a:pPr>
-            <a:endParaRPr lang="en-US" sz="1500" dirty="0"/>
-          </a:p>
-          <a:p>
-            <a:pPr indent="0" marL="0">
-              <a:lnSpc>
-                <a:spcPct val="130000"/>
-              </a:lnSpc>
-              <a:buNone/>
-            </a:pPr>
-            <a:r>
-              <a:rPr lang="en-US" sz="1500" dirty="0">
-                <a:solidFill>
-                  <a:srgbClr val="1A1A1A"/>
-                </a:solidFill>
-                <a:latin typeface="Calibri" pitchFamily="34" charset="0"/>
-                <a:ea typeface="Calibri" pitchFamily="34" charset="-122"/>
-                <a:cs typeface="Calibri" pitchFamily="34" charset="-120"/>
-              </a:rPr>
-              <a:t>Competition usually means lower prices and better quality for buyers.</a:t>
-            </a:r>
-            <a:endParaRPr lang="en-US" sz="1500" dirty="0"/>
+              <a:t>Individuals and firms own resources — Tom owns his printer and business, not the state.</a:t>
+            </a:r>
+            <a:endParaRPr lang="en-US" sz="1250" dirty="0"/>
           </a:p>
         </p:txBody>
       </p:sp>
@@ -2449,12 +2776,12 @@
         </p:nvSpPr>
         <p:spPr>
           <a:xfrm>
-            <a:off x="6126480" y="1554480"/>
-            <a:ext cx="5212080" cy="3931920"/>
+            <a:off x="4448556" y="1828800"/>
+            <a:ext cx="3291840" cy="3108960"/>
           </a:xfrm>
           <a:prstGeom prst="roundRect">
             <a:avLst>
-              <a:gd name="adj" fmla="val 2791"/>
+              <a:gd name="adj" fmla="val 3529"/>
             </a:avLst>
           </a:prstGeom>
           <a:solidFill>
@@ -2471,8 +2798,8 @@
         </p:nvSpPr>
         <p:spPr>
           <a:xfrm>
-            <a:off x="6400800" y="1783080"/>
-            <a:ext cx="4663440" cy="457200"/>
+            <a:off x="4722876" y="2103120"/>
+            <a:ext cx="2743200" cy="548640"/>
           </a:xfrm>
           <a:prstGeom prst="rect">
             <a:avLst/>
@@ -2488,17 +2815,17 @@
               <a:buNone/>
             </a:pPr>
             <a:r>
-              <a:rPr lang="en-US" sz="1800" b="1" dirty="0">
-                <a:solidFill>
-                  <a:srgbClr val="D98C00"/>
-                </a:solidFill>
-                <a:latin typeface="Calibri" pitchFamily="34" charset="0"/>
-                <a:ea typeface="Calibri" pitchFamily="34" charset="-122"/>
-                <a:cs typeface="Calibri" pitchFamily="34" charset="-120"/>
-              </a:rPr>
-              <a:t>Innovation</a:t>
-            </a:r>
-            <a:endParaRPr lang="en-US" sz="1800" dirty="0"/>
+              <a:rPr lang="en-US" sz="1600" b="1" dirty="0">
+                <a:solidFill>
+                  <a:srgbClr val="1E2761"/>
+                </a:solidFill>
+                <a:latin typeface="Calibri" pitchFamily="34" charset="0"/>
+                <a:ea typeface="Calibri" pitchFamily="34" charset="-122"/>
+                <a:cs typeface="Calibri" pitchFamily="34" charset="-120"/>
+              </a:rPr>
+              <a:t>Profit motive</a:t>
+            </a:r>
+            <a:endParaRPr lang="en-US" sz="1600" dirty="0"/>
           </a:p>
         </p:txBody>
       </p:sp>
@@ -2510,8 +2837,8 @@
         </p:nvSpPr>
         <p:spPr>
           <a:xfrm>
-            <a:off x="6400800" y="2286000"/>
-            <a:ext cx="4663440" cy="3017520"/>
+            <a:off x="4722876" y="2697480"/>
+            <a:ext cx="2743200" cy="2011680"/>
           </a:xfrm>
           <a:prstGeom prst="rect">
             <a:avLst/>
@@ -2525,12 +2852,12 @@
           <a:p>
             <a:pPr indent="0" marL="0">
               <a:lnSpc>
-                <a:spcPct val="130000"/>
+                <a:spcPct val="125000"/>
               </a:lnSpc>
               <a:buNone/>
             </a:pPr>
             <a:r>
-              <a:rPr lang="en-US" sz="1500" dirty="0">
+              <a:rPr lang="en-US" sz="1250" dirty="0">
                 <a:solidFill>
                   <a:srgbClr val="1A1A1A"/>
                 </a:solidFill>
@@ -2538,28 +2865,102 @@
                 <a:ea typeface="Calibri" pitchFamily="34" charset="-122"/>
                 <a:cs typeface="Calibri" pitchFamily="34" charset="-120"/>
               </a:rPr>
-              <a:t>Tom redesigns his workflow to cut delivery from a week to two days — no government told him to.</a:t>
-            </a:r>
-            <a:endParaRPr lang="en-US" sz="1500" dirty="0"/>
-          </a:p>
+              <a:t>Producers are driven by the goal of making a profit — that decides what gets made.</a:t>
+            </a:r>
+            <a:endParaRPr lang="en-US" sz="1250" dirty="0"/>
+          </a:p>
+        </p:txBody>
+      </p:sp>
+      <p:sp>
+        <p:nvSpPr>
+          <p:cNvPr id="9" name="Shape 7"/>
+          <p:cNvSpPr/>
+          <p:nvPr/>
+        </p:nvSpPr>
+        <p:spPr>
+          <a:xfrm>
+            <a:off x="8106156" y="1828800"/>
+            <a:ext cx="3291840" cy="3108960"/>
+          </a:xfrm>
+          <a:prstGeom prst="roundRect">
+            <a:avLst>
+              <a:gd name="adj" fmla="val 3529"/>
+            </a:avLst>
+          </a:prstGeom>
+          <a:solidFill>
+            <a:srgbClr val="F4F5F7"/>
+          </a:solidFill>
+          <a:ln/>
+        </p:spPr>
+      </p:sp>
+      <p:sp>
+        <p:nvSpPr>
+          <p:cNvPr id="10" name="Text 8"/>
+          <p:cNvSpPr/>
+          <p:nvPr/>
+        </p:nvSpPr>
+        <p:spPr>
+          <a:xfrm>
+            <a:off x="8380476" y="2103120"/>
+            <a:ext cx="2743200" cy="548640"/>
+          </a:xfrm>
+          <a:prstGeom prst="rect">
+            <a:avLst/>
+          </a:prstGeom>
+          <a:noFill/>
+          <a:ln/>
+        </p:spPr>
+        <p:txBody>
+          <a:bodyPr wrap="square" rtlCol="0" anchor="ctr"/>
+          <a:lstStyle/>
+          <a:p>
+            <a:pPr indent="0" marL="0">
+              <a:buNone/>
+            </a:pPr>
+            <a:r>
+              <a:rPr lang="en-US" sz="1600" b="1" dirty="0">
+                <a:solidFill>
+                  <a:srgbClr val="1E2761"/>
+                </a:solidFill>
+                <a:latin typeface="Calibri" pitchFamily="34" charset="0"/>
+                <a:ea typeface="Calibri" pitchFamily="34" charset="-122"/>
+                <a:cs typeface="Calibri" pitchFamily="34" charset="-120"/>
+              </a:rPr>
+              <a:t>Freedom of choice</a:t>
+            </a:r>
+            <a:endParaRPr lang="en-US" sz="1600" dirty="0"/>
+          </a:p>
+        </p:txBody>
+      </p:sp>
+      <p:sp>
+        <p:nvSpPr>
+          <p:cNvPr id="11" name="Text 9"/>
+          <p:cNvSpPr/>
+          <p:nvPr/>
+        </p:nvSpPr>
+        <p:spPr>
+          <a:xfrm>
+            <a:off x="8380476" y="2697480"/>
+            <a:ext cx="2743200" cy="2011680"/>
+          </a:xfrm>
+          <a:prstGeom prst="rect">
+            <a:avLst/>
+          </a:prstGeom>
+          <a:noFill/>
+          <a:ln/>
+        </p:spPr>
+        <p:txBody>
+          <a:bodyPr wrap="square" rtlCol="0" anchor="t"/>
+          <a:lstStyle/>
           <a:p>
             <a:pPr indent="0" marL="0">
               <a:lnSpc>
-                <a:spcPct val="130000"/>
+                <a:spcPct val="125000"/>
               </a:lnSpc>
               <a:buNone/>
             </a:pPr>
-            <a:endParaRPr lang="en-US" sz="1500" dirty="0"/>
-          </a:p>
-          <a:p>
-            <a:pPr indent="0" marL="0">
-              <a:lnSpc>
-                <a:spcPct val="130000"/>
-              </a:lnSpc>
-              <a:buNone/>
-            </a:pPr>
-            <a:r>
-              <a:rPr lang="en-US" sz="1500" dirty="0">
+            <a:r>
+              <a:rPr lang="en-US" sz="1250" dirty="0">
                 <a:solidFill>
                   <a:srgbClr val="1A1A1A"/>
                 </a:solidFill>
@@ -2567,9 +2968,9 @@
                 <a:ea typeface="Calibri" pitchFamily="34" charset="-122"/>
                 <a:cs typeface="Calibri" pitchFamily="34" charset="-120"/>
               </a:rPr>
-              <a:t>The profit motive drove the improvement on his own initiative.</a:t>
-            </a:r>
-            <a:endParaRPr lang="en-US" sz="1500" dirty="0"/>
+              <a:t>Consumers choose what to buy; producers choose what to sell and at what price.</a:t>
+            </a:r>
+            <a:endParaRPr lang="en-US" sz="1250" dirty="0"/>
           </a:p>
         </p:txBody>
       </p:sp>
@@ -2614,7 +3015,7 @@
         <p:spPr>
           <a:xfrm>
             <a:off x="640080" y="548640"/>
-            <a:ext cx="10881360" cy="822960"/>
+            <a:ext cx="10881360" cy="731520"/>
           </a:xfrm>
           <a:prstGeom prst="rect">
             <a:avLst/>
@@ -2630,7 +3031,7 @@
               <a:buNone/>
             </a:pPr>
             <a:r>
-              <a:rPr lang="en-US" sz="3200" b="1" dirty="0">
+              <a:rPr lang="en-US" sz="3000" b="1" dirty="0">
                 <a:solidFill>
                   <a:srgbClr val="1E2761"/>
                 </a:solidFill>
@@ -2638,22 +3039,83 @@
                 <a:ea typeface="Cambria" pitchFamily="34" charset="-122"/>
                 <a:cs typeface="Cambria" pitchFamily="34" charset="-120"/>
               </a:rPr>
-              <a:t>Disadvantages of the market system</a:t>
-            </a:r>
-            <a:endParaRPr lang="en-US" sz="3200" dirty="0"/>
-          </a:p>
-        </p:txBody>
-      </p:sp>
-      <p:sp>
-        <p:nvSpPr>
-          <p:cNvPr id="3" name="Text 1"/>
-          <p:cNvSpPr/>
-          <p:nvPr/>
-        </p:nvSpPr>
-        <p:spPr>
-          <a:xfrm>
-            <a:off x="822960" y="1828800"/>
-            <a:ext cx="9875520" cy="4114800"/>
+              <a:t>Characteristics of a market economy (2/2)</a:t>
+            </a:r>
+            <a:endParaRPr lang="en-US" sz="3000" dirty="0"/>
+          </a:p>
+        </p:txBody>
+      </p:sp>
+      <p:sp>
+        <p:nvSpPr>
+          <p:cNvPr id="3" name="Shape 1"/>
+          <p:cNvSpPr/>
+          <p:nvPr/>
+        </p:nvSpPr>
+        <p:spPr>
+          <a:xfrm>
+            <a:off x="2619756" y="1828800"/>
+            <a:ext cx="3291840" cy="3108960"/>
+          </a:xfrm>
+          <a:prstGeom prst="roundRect">
+            <a:avLst>
+              <a:gd name="adj" fmla="val 3529"/>
+            </a:avLst>
+          </a:prstGeom>
+          <a:solidFill>
+            <a:srgbClr val="F4F5F7"/>
+          </a:solidFill>
+          <a:ln/>
+        </p:spPr>
+      </p:sp>
+      <p:sp>
+        <p:nvSpPr>
+          <p:cNvPr id="4" name="Text 2"/>
+          <p:cNvSpPr/>
+          <p:nvPr/>
+        </p:nvSpPr>
+        <p:spPr>
+          <a:xfrm>
+            <a:off x="2894076" y="2103120"/>
+            <a:ext cx="2743200" cy="548640"/>
+          </a:xfrm>
+          <a:prstGeom prst="rect">
+            <a:avLst/>
+          </a:prstGeom>
+          <a:noFill/>
+          <a:ln/>
+        </p:spPr>
+        <p:txBody>
+          <a:bodyPr wrap="square" rtlCol="0" anchor="ctr"/>
+          <a:lstStyle/>
+          <a:p>
+            <a:pPr indent="0" marL="0">
+              <a:buNone/>
+            </a:pPr>
+            <a:r>
+              <a:rPr lang="en-US" sz="1600" b="1" dirty="0">
+                <a:solidFill>
+                  <a:srgbClr val="1E2761"/>
+                </a:solidFill>
+                <a:latin typeface="Calibri" pitchFamily="34" charset="0"/>
+                <a:ea typeface="Calibri" pitchFamily="34" charset="-122"/>
+                <a:cs typeface="Calibri" pitchFamily="34" charset="-120"/>
+              </a:rPr>
+              <a:t>Competition</a:t>
+            </a:r>
+            <a:endParaRPr lang="en-US" sz="1600" dirty="0"/>
+          </a:p>
+        </p:txBody>
+      </p:sp>
+      <p:sp>
+        <p:nvSpPr>
+          <p:cNvPr id="5" name="Text 3"/>
+          <p:cNvSpPr/>
+          <p:nvPr/>
+        </p:nvSpPr>
+        <p:spPr>
+          <a:xfrm>
+            <a:off x="2894076" y="2697480"/>
+            <a:ext cx="2743200" cy="2011680"/>
           </a:xfrm>
           <a:prstGeom prst="rect">
             <a:avLst/>
@@ -2667,15 +3129,12 @@
           <a:p>
             <a:pPr indent="0" marL="0">
               <a:lnSpc>
-                <a:spcPct val="130000"/>
+                <a:spcPct val="125000"/>
               </a:lnSpc>
-              <a:spcAft>
-                <a:spcPts val="1400"/>
-              </a:spcAft>
-              <a:buNone/>
-            </a:pPr>
-            <a:r>
-              <a:rPr lang="en-US" sz="1800" dirty="0">
+              <a:buNone/>
+            </a:pPr>
+            <a:r>
+              <a:rPr lang="en-US" sz="1250" dirty="0">
                 <a:solidFill>
                   <a:srgbClr val="1A1A1A"/>
                 </a:solidFill>
@@ -2683,22 +3142,102 @@
                 <a:ea typeface="Calibri" pitchFamily="34" charset="-122"/>
                 <a:cs typeface="Calibri" pitchFamily="34" charset="-120"/>
               </a:rPr>
-              <a:t>Inequality — the market only responds to effective demand (want + ability to pay).</a:t>
-            </a:r>
-            <a:endParaRPr lang="en-US" sz="1800" dirty="0"/>
-          </a:p>
+              <a:t>Rival producers compete for customers, pushing prices down and quality/innovation up.</a:t>
+            </a:r>
+            <a:endParaRPr lang="en-US" sz="1250" dirty="0"/>
+          </a:p>
+        </p:txBody>
+      </p:sp>
+      <p:sp>
+        <p:nvSpPr>
+          <p:cNvPr id="6" name="Shape 4"/>
+          <p:cNvSpPr/>
+          <p:nvPr/>
+        </p:nvSpPr>
+        <p:spPr>
+          <a:xfrm>
+            <a:off x="6277356" y="1828800"/>
+            <a:ext cx="3291840" cy="3108960"/>
+          </a:xfrm>
+          <a:prstGeom prst="roundRect">
+            <a:avLst>
+              <a:gd name="adj" fmla="val 3529"/>
+            </a:avLst>
+          </a:prstGeom>
+          <a:solidFill>
+            <a:srgbClr val="F4F5F7"/>
+          </a:solidFill>
+          <a:ln/>
+        </p:spPr>
+      </p:sp>
+      <p:sp>
+        <p:nvSpPr>
+          <p:cNvPr id="7" name="Text 5"/>
+          <p:cNvSpPr/>
+          <p:nvPr/>
+        </p:nvSpPr>
+        <p:spPr>
+          <a:xfrm>
+            <a:off x="6551676" y="2103120"/>
+            <a:ext cx="2743200" cy="548640"/>
+          </a:xfrm>
+          <a:prstGeom prst="rect">
+            <a:avLst/>
+          </a:prstGeom>
+          <a:noFill/>
+          <a:ln/>
+        </p:spPr>
+        <p:txBody>
+          <a:bodyPr wrap="square" rtlCol="0" anchor="ctr"/>
+          <a:lstStyle/>
+          <a:p>
+            <a:pPr indent="0" marL="0">
+              <a:buNone/>
+            </a:pPr>
+            <a:r>
+              <a:rPr lang="en-US" sz="1600" b="1" dirty="0">
+                <a:solidFill>
+                  <a:srgbClr val="1E2761"/>
+                </a:solidFill>
+                <a:latin typeface="Calibri" pitchFamily="34" charset="0"/>
+                <a:ea typeface="Calibri" pitchFamily="34" charset="-122"/>
+                <a:cs typeface="Calibri" pitchFamily="34" charset="-120"/>
+              </a:rPr>
+              <a:t>Minimal government role</a:t>
+            </a:r>
+            <a:endParaRPr lang="en-US" sz="1600" dirty="0"/>
+          </a:p>
+        </p:txBody>
+      </p:sp>
+      <p:sp>
+        <p:nvSpPr>
+          <p:cNvPr id="8" name="Text 6"/>
+          <p:cNvSpPr/>
+          <p:nvPr/>
+        </p:nvSpPr>
+        <p:spPr>
+          <a:xfrm>
+            <a:off x="6551676" y="2697480"/>
+            <a:ext cx="2743200" cy="2011680"/>
+          </a:xfrm>
+          <a:prstGeom prst="rect">
+            <a:avLst/>
+          </a:prstGeom>
+          <a:noFill/>
+          <a:ln/>
+        </p:spPr>
+        <p:txBody>
+          <a:bodyPr wrap="square" rtlCol="0" anchor="t"/>
+          <a:lstStyle/>
           <a:p>
             <a:pPr indent="0" marL="0">
               <a:lnSpc>
-                <a:spcPct val="130000"/>
+                <a:spcPct val="125000"/>
               </a:lnSpc>
-              <a:spcAft>
-                <a:spcPts val="1400"/>
-              </a:spcAft>
-              <a:buNone/>
-            </a:pPr>
-            <a:r>
-              <a:rPr lang="en-US" sz="1800" dirty="0">
+              <a:buNone/>
+            </a:pPr>
+            <a:r>
+              <a:rPr lang="en-US" sz="1250" dirty="0">
                 <a:solidFill>
                   <a:srgbClr val="1A1A1A"/>
                 </a:solidFill>
@@ -2706,55 +3245,9 @@
                 <a:ea typeface="Calibri" pitchFamily="34" charset="-122"/>
                 <a:cs typeface="Calibri" pitchFamily="34" charset="-120"/>
               </a:rPr>
-              <a:t>Public goods under-provided — hard to charge individuals for things like street lighting.</a:t>
-            </a:r>
-            <a:endParaRPr lang="en-US" sz="1800" dirty="0"/>
-          </a:p>
-          <a:p>
-            <a:pPr indent="0" marL="0">
-              <a:lnSpc>
-                <a:spcPct val="130000"/>
-              </a:lnSpc>
-              <a:spcAft>
-                <a:spcPts val="1400"/>
-              </a:spcAft>
-              <a:buNone/>
-            </a:pPr>
-            <a:r>
-              <a:rPr lang="en-US" sz="1800" dirty="0">
-                <a:solidFill>
-                  <a:srgbClr val="1A1A1A"/>
-                </a:solidFill>
-                <a:latin typeface="Calibri" pitchFamily="34" charset="0"/>
-                <a:ea typeface="Calibri" pitchFamily="34" charset="-122"/>
-                <a:cs typeface="Calibri" pitchFamily="34" charset="-120"/>
-              </a:rPr>
-              <a:t>Externalities ignored — market price often leaves out spillover costs, like pollution.</a:t>
-            </a:r>
-            <a:endParaRPr lang="en-US" sz="1800" dirty="0"/>
-          </a:p>
-          <a:p>
-            <a:pPr indent="0" marL="0">
-              <a:lnSpc>
-                <a:spcPct val="130000"/>
-              </a:lnSpc>
-              <a:spcAft>
-                <a:spcPts val="1400"/>
-              </a:spcAft>
-              <a:buNone/>
-            </a:pPr>
-            <a:r>
-              <a:rPr lang="en-US" sz="1800" dirty="0">
-                <a:solidFill>
-                  <a:srgbClr val="1A1A1A"/>
-                </a:solidFill>
-                <a:latin typeface="Calibri" pitchFamily="34" charset="0"/>
-                <a:ea typeface="Calibri" pitchFamily="34" charset="-122"/>
-                <a:cs typeface="Calibri" pitchFamily="34" charset="-120"/>
-              </a:rPr>
-              <a:t>Monopoly power — a dominant firm can raise prices and cut quality unchallenged.</a:t>
-            </a:r>
-            <a:endParaRPr lang="en-US" sz="1800" dirty="0"/>
+              <a:t>The state mostly stays out of day-to-day production and pricing decisions.</a:t>
+            </a:r>
+            <a:endParaRPr lang="en-US" sz="1250" dirty="0"/>
           </a:p>
         </p:txBody>
       </p:sp>
@@ -2799,7 +3292,7 @@
         <p:spPr>
           <a:xfrm>
             <a:off x="640080" y="548640"/>
-            <a:ext cx="10881360" cy="731520"/>
+            <a:ext cx="10881360" cy="822960"/>
           </a:xfrm>
           <a:prstGeom prst="rect">
             <a:avLst/>
@@ -2815,7 +3308,7 @@
               <a:buNone/>
             </a:pPr>
             <a:r>
-              <a:rPr lang="en-US" sz="3000" b="1" dirty="0">
+              <a:rPr lang="en-US" sz="3200" b="1" dirty="0">
                 <a:solidFill>
                   <a:srgbClr val="1E2761"/>
                 </a:solidFill>
@@ -2823,83 +3316,22 @@
                 <a:ea typeface="Cambria" pitchFamily="34" charset="-122"/>
                 <a:cs typeface="Cambria" pitchFamily="34" charset="-120"/>
               </a:rPr>
-              <a:t>Disadvantages in action</a:t>
-            </a:r>
-            <a:endParaRPr lang="en-US" sz="3000" dirty="0"/>
-          </a:p>
-        </p:txBody>
-      </p:sp>
-      <p:sp>
-        <p:nvSpPr>
-          <p:cNvPr id="3" name="Shape 1"/>
-          <p:cNvSpPr/>
-          <p:nvPr/>
-        </p:nvSpPr>
-        <p:spPr>
-          <a:xfrm>
-            <a:off x="790956" y="1828800"/>
-            <a:ext cx="3291840" cy="3108960"/>
-          </a:xfrm>
-          <a:prstGeom prst="roundRect">
-            <a:avLst>
-              <a:gd name="adj" fmla="val 3529"/>
-            </a:avLst>
-          </a:prstGeom>
-          <a:solidFill>
-            <a:srgbClr val="F4F5F7"/>
-          </a:solidFill>
-          <a:ln/>
-        </p:spPr>
-      </p:sp>
-      <p:sp>
-        <p:nvSpPr>
-          <p:cNvPr id="4" name="Text 2"/>
-          <p:cNvSpPr/>
-          <p:nvPr/>
-        </p:nvSpPr>
-        <p:spPr>
-          <a:xfrm>
-            <a:off x="1065276" y="2103120"/>
-            <a:ext cx="2743200" cy="548640"/>
-          </a:xfrm>
-          <a:prstGeom prst="rect">
-            <a:avLst/>
-          </a:prstGeom>
-          <a:noFill/>
-          <a:ln/>
-        </p:spPr>
-        <p:txBody>
-          <a:bodyPr wrap="square" rtlCol="0" anchor="ctr"/>
-          <a:lstStyle/>
-          <a:p>
-            <a:pPr indent="0" marL="0">
-              <a:buNone/>
-            </a:pPr>
-            <a:r>
-              <a:rPr lang="en-US" sz="1600" b="1" dirty="0">
-                <a:solidFill>
-                  <a:srgbClr val="1E2761"/>
-                </a:solidFill>
-                <a:latin typeface="Calibri" pitchFamily="34" charset="0"/>
-                <a:ea typeface="Calibri" pitchFamily="34" charset="-122"/>
-                <a:cs typeface="Calibri" pitchFamily="34" charset="-120"/>
-              </a:rPr>
-              <a:t>Externality</a:t>
-            </a:r>
-            <a:endParaRPr lang="en-US" sz="1600" dirty="0"/>
-          </a:p>
-        </p:txBody>
-      </p:sp>
-      <p:sp>
-        <p:nvSpPr>
-          <p:cNvPr id="5" name="Text 3"/>
-          <p:cNvSpPr/>
-          <p:nvPr/>
-        </p:nvSpPr>
-        <p:spPr>
-          <a:xfrm>
-            <a:off x="1065276" y="2697480"/>
-            <a:ext cx="2743200" cy="2011680"/>
+              <a:t>Now you try: market or planned?</a:t>
+            </a:r>
+            <a:endParaRPr lang="en-US" sz="3200" dirty="0"/>
+          </a:p>
+        </p:txBody>
+      </p:sp>
+      <p:sp>
+        <p:nvSpPr>
+          <p:cNvPr id="3" name="Text 1"/>
+          <p:cNvSpPr/>
+          <p:nvPr/>
+        </p:nvSpPr>
+        <p:spPr>
+          <a:xfrm>
+            <a:off x="822960" y="1828800"/>
+            <a:ext cx="9875520" cy="4114800"/>
           </a:xfrm>
           <a:prstGeom prst="rect">
             <a:avLst/>
@@ -2913,12 +3345,15 @@
           <a:p>
             <a:pPr indent="0" marL="0">
               <a:lnSpc>
-                <a:spcPct val="125000"/>
+                <a:spcPct val="130000"/>
               </a:lnSpc>
-              <a:buNone/>
-            </a:pPr>
-            <a:r>
-              <a:rPr lang="en-US" sz="1250" dirty="0">
+              <a:spcAft>
+                <a:spcPts val="1400"/>
+              </a:spcAft>
+              <a:buNone/>
+            </a:pPr>
+            <a:r>
+              <a:rPr lang="en-US" sz="1800" dirty="0">
                 <a:solidFill>
                   <a:srgbClr val="1A1A1A"/>
                 </a:solidFill>
@@ -2926,102 +3361,22 @@
                 <a:ea typeface="Calibri" pitchFamily="34" charset="-122"/>
                 <a:cs typeface="Calibri" pitchFamily="34" charset="-120"/>
               </a:rPr>
-              <a:t>Tom's printer produces plastic waste in a local stream — not reflected in the $8 grip price.</a:t>
-            </a:r>
-            <a:endParaRPr lang="en-US" sz="1250" dirty="0"/>
-          </a:p>
-        </p:txBody>
-      </p:sp>
-      <p:sp>
-        <p:nvSpPr>
-          <p:cNvPr id="6" name="Shape 4"/>
-          <p:cNvSpPr/>
-          <p:nvPr/>
-        </p:nvSpPr>
-        <p:spPr>
-          <a:xfrm>
-            <a:off x="4448556" y="1828800"/>
-            <a:ext cx="3291840" cy="3108960"/>
-          </a:xfrm>
-          <a:prstGeom prst="roundRect">
-            <a:avLst>
-              <a:gd name="adj" fmla="val 3529"/>
-            </a:avLst>
-          </a:prstGeom>
-          <a:solidFill>
-            <a:srgbClr val="F4F5F7"/>
-          </a:solidFill>
-          <a:ln/>
-        </p:spPr>
-      </p:sp>
-      <p:sp>
-        <p:nvSpPr>
-          <p:cNvPr id="7" name="Text 5"/>
-          <p:cNvSpPr/>
-          <p:nvPr/>
-        </p:nvSpPr>
-        <p:spPr>
-          <a:xfrm>
-            <a:off x="4722876" y="2103120"/>
-            <a:ext cx="2743200" cy="548640"/>
-          </a:xfrm>
-          <a:prstGeom prst="rect">
-            <a:avLst/>
-          </a:prstGeom>
-          <a:noFill/>
-          <a:ln/>
-        </p:spPr>
-        <p:txBody>
-          <a:bodyPr wrap="square" rtlCol="0" anchor="ctr"/>
-          <a:lstStyle/>
-          <a:p>
-            <a:pPr indent="0" marL="0">
-              <a:buNone/>
-            </a:pPr>
-            <a:r>
-              <a:rPr lang="en-US" sz="1600" b="1" dirty="0">
-                <a:solidFill>
-                  <a:srgbClr val="1E2761"/>
-                </a:solidFill>
-                <a:latin typeface="Calibri" pitchFamily="34" charset="0"/>
-                <a:ea typeface="Calibri" pitchFamily="34" charset="-122"/>
-                <a:cs typeface="Calibri" pitchFamily="34" charset="-120"/>
-              </a:rPr>
-              <a:t>Inequality</a:t>
-            </a:r>
-            <a:endParaRPr lang="en-US" sz="1600" dirty="0"/>
-          </a:p>
-        </p:txBody>
-      </p:sp>
-      <p:sp>
-        <p:nvSpPr>
-          <p:cNvPr id="8" name="Text 6"/>
-          <p:cNvSpPr/>
-          <p:nvPr/>
-        </p:nvSpPr>
-        <p:spPr>
-          <a:xfrm>
-            <a:off x="4722876" y="2697480"/>
-            <a:ext cx="2743200" cy="2011680"/>
-          </a:xfrm>
-          <a:prstGeom prst="rect">
-            <a:avLst/>
-          </a:prstGeom>
-          <a:noFill/>
-          <a:ln/>
-        </p:spPr>
-        <p:txBody>
-          <a:bodyPr wrap="square" rtlCol="0" anchor="t"/>
-          <a:lstStyle/>
+              <a:t>Tom decides what to make based on what sells best.</a:t>
+            </a:r>
+            <a:endParaRPr lang="en-US" sz="1800" dirty="0"/>
+          </a:p>
           <a:p>
             <a:pPr indent="0" marL="0">
               <a:lnSpc>
-                <a:spcPct val="125000"/>
+                <a:spcPct val="130000"/>
               </a:lnSpc>
-              <a:buNone/>
-            </a:pPr>
-            <a:r>
-              <a:rPr lang="en-US" sz="1250" dirty="0">
+              <a:spcAft>
+                <a:spcPts val="1400"/>
+              </a:spcAft>
+              <a:buNone/>
+            </a:pPr>
+            <a:r>
+              <a:rPr lang="en-US" sz="1800" dirty="0">
                 <a:solidFill>
                   <a:srgbClr val="1A1A1A"/>
                 </a:solidFill>
@@ -3029,102 +3384,22 @@
                 <a:ea typeface="Calibri" pitchFamily="34" charset="-122"/>
                 <a:cs typeface="Calibri" pitchFamily="34" charset="-120"/>
               </a:rPr>
-              <a:t>A family that can't afford court fees wants to play — the market doesn't respond to that want.</a:t>
-            </a:r>
-            <a:endParaRPr lang="en-US" sz="1250" dirty="0"/>
-          </a:p>
-        </p:txBody>
-      </p:sp>
-      <p:sp>
-        <p:nvSpPr>
-          <p:cNvPr id="9" name="Shape 7"/>
-          <p:cNvSpPr/>
-          <p:nvPr/>
-        </p:nvSpPr>
-        <p:spPr>
-          <a:xfrm>
-            <a:off x="8106156" y="1828800"/>
-            <a:ext cx="3291840" cy="3108960"/>
-          </a:xfrm>
-          <a:prstGeom prst="roundRect">
-            <a:avLst>
-              <a:gd name="adj" fmla="val 3529"/>
-            </a:avLst>
-          </a:prstGeom>
-          <a:solidFill>
-            <a:srgbClr val="F4F5F7"/>
-          </a:solidFill>
-          <a:ln/>
-        </p:spPr>
-      </p:sp>
-      <p:sp>
-        <p:nvSpPr>
-          <p:cNvPr id="10" name="Text 8"/>
-          <p:cNvSpPr/>
-          <p:nvPr/>
-        </p:nvSpPr>
-        <p:spPr>
-          <a:xfrm>
-            <a:off x="8380476" y="2103120"/>
-            <a:ext cx="2743200" cy="548640"/>
-          </a:xfrm>
-          <a:prstGeom prst="rect">
-            <a:avLst/>
-          </a:prstGeom>
-          <a:noFill/>
-          <a:ln/>
-        </p:spPr>
-        <p:txBody>
-          <a:bodyPr wrap="square" rtlCol="0" anchor="ctr"/>
-          <a:lstStyle/>
-          <a:p>
-            <a:pPr indent="0" marL="0">
-              <a:buNone/>
-            </a:pPr>
-            <a:r>
-              <a:rPr lang="en-US" sz="1600" b="1" dirty="0">
-                <a:solidFill>
-                  <a:srgbClr val="1E2761"/>
-                </a:solidFill>
-                <a:latin typeface="Calibri" pitchFamily="34" charset="0"/>
-                <a:ea typeface="Calibri" pitchFamily="34" charset="-122"/>
-                <a:cs typeface="Calibri" pitchFamily="34" charset="-120"/>
-              </a:rPr>
-              <a:t>Public goods</a:t>
-            </a:r>
-            <a:endParaRPr lang="en-US" sz="1600" dirty="0"/>
-          </a:p>
-        </p:txBody>
-      </p:sp>
-      <p:sp>
-        <p:nvSpPr>
-          <p:cNvPr id="11" name="Text 9"/>
-          <p:cNvSpPr/>
-          <p:nvPr/>
-        </p:nvSpPr>
-        <p:spPr>
-          <a:xfrm>
-            <a:off x="8380476" y="2697480"/>
-            <a:ext cx="2743200" cy="2011680"/>
-          </a:xfrm>
-          <a:prstGeom prst="rect">
-            <a:avLst/>
-          </a:prstGeom>
-          <a:noFill/>
-          <a:ln/>
-        </p:spPr>
-        <p:txBody>
-          <a:bodyPr wrap="square" rtlCol="0" anchor="t"/>
-          <a:lstStyle/>
+              <a:t>A government official sets padel court prices for the whole country.</a:t>
+            </a:r>
+            <a:endParaRPr lang="en-US" sz="1800" dirty="0"/>
+          </a:p>
           <a:p>
             <a:pPr indent="0" marL="0">
               <a:lnSpc>
-                <a:spcPct val="125000"/>
+                <a:spcPct val="130000"/>
               </a:lnSpc>
-              <a:buNone/>
-            </a:pPr>
-            <a:r>
-              <a:rPr lang="en-US" sz="1250" dirty="0">
+              <a:spcAft>
+                <a:spcPts val="1400"/>
+              </a:spcAft>
+              <a:buNone/>
+            </a:pPr>
+            <a:r>
+              <a:rPr lang="en-US" sz="1800" dirty="0">
                 <a:solidFill>
                   <a:srgbClr val="1A1A1A"/>
                 </a:solidFill>
@@ -3132,9 +3407,32 @@
                 <a:ea typeface="Calibri" pitchFamily="34" charset="-122"/>
                 <a:cs typeface="Calibri" pitchFamily="34" charset="-120"/>
               </a:rPr>
-              <a:t>Nobody privately installs streetlights on the path to the club — no profit incentive to.</a:t>
-            </a:r>
-            <a:endParaRPr lang="en-US" sz="1250" dirty="0"/>
+              <a:t>Anyone can start a 3D-printing business if they think they can profit.</a:t>
+            </a:r>
+            <a:endParaRPr lang="en-US" sz="1800" dirty="0"/>
+          </a:p>
+          <a:p>
+            <a:pPr indent="0" marL="0">
+              <a:lnSpc>
+                <a:spcPct val="130000"/>
+              </a:lnSpc>
+              <a:spcAft>
+                <a:spcPts val="1400"/>
+              </a:spcAft>
+              <a:buNone/>
+            </a:pPr>
+            <a:r>
+              <a:rPr lang="en-US" sz="1800" dirty="0">
+                <a:solidFill>
+                  <a:srgbClr val="1A1A1A"/>
+                </a:solidFill>
+                <a:latin typeface="Calibri" pitchFamily="34" charset="0"/>
+                <a:ea typeface="Calibri" pitchFamily="34" charset="-122"/>
+                <a:cs typeface="Calibri" pitchFamily="34" charset="-120"/>
+              </a:rPr>
+              <a:t>The government owns every padel club and decides how many courts each town gets.</a:t>
+            </a:r>
+            <a:endParaRPr lang="en-US" sz="1800" dirty="0"/>
           </a:p>
         </p:txBody>
       </p:sp>
@@ -3203,7 +3501,7 @@
                 <a:ea typeface="Cambria" pitchFamily="34" charset="-122"/>
                 <a:cs typeface="Cambria" pitchFamily="34" charset="-120"/>
               </a:rPr>
-              <a:t>Quick check</a:t>
+              <a:t>Advantages of the market system</a:t>
             </a:r>
             <a:endParaRPr lang="en-US" sz="3200" dirty="0"/>
           </a:p>
@@ -3248,7 +3546,7 @@
                 <a:ea typeface="Calibri" pitchFamily="34" charset="-122"/>
                 <a:cs typeface="Calibri" pitchFamily="34" charset="-120"/>
               </a:rPr>
-              <a:t>In a market economy, who decides who goods actually go to?</a:t>
+              <a:t>Efficient allocation — resources flow toward what consumers actually want.</a:t>
             </a:r>
             <a:endParaRPr lang="en-US" sz="1800" dirty="0"/>
           </a:p>
@@ -3271,7 +3569,53 @@
                 <a:ea typeface="Calibri" pitchFamily="34" charset="-122"/>
                 <a:cs typeface="Calibri" pitchFamily="34" charset="-120"/>
               </a:rPr>
-              <a:t>Does a pure market system automatically account for pollution costs?</a:t>
+              <a:t>Consumer choice — many competing products, not one state-approved option.</a:t>
+            </a:r>
+            <a:endParaRPr lang="en-US" sz="1800" dirty="0"/>
+          </a:p>
+          <a:p>
+            <a:pPr indent="0" marL="0">
+              <a:lnSpc>
+                <a:spcPct val="130000"/>
+              </a:lnSpc>
+              <a:spcAft>
+                <a:spcPts val="1400"/>
+              </a:spcAft>
+              <a:buNone/>
+            </a:pPr>
+            <a:r>
+              <a:rPr lang="en-US" sz="1800" dirty="0">
+                <a:solidFill>
+                  <a:srgbClr val="1A1A1A"/>
+                </a:solidFill>
+                <a:latin typeface="Calibri" pitchFamily="34" charset="0"/>
+                <a:ea typeface="Calibri" pitchFamily="34" charset="-122"/>
+                <a:cs typeface="Calibri" pitchFamily="34" charset="-120"/>
+              </a:rPr>
+              <a:t>Incentive to innovate — competition rewards cutting costs or building something better.</a:t>
+            </a:r>
+            <a:endParaRPr lang="en-US" sz="1800" dirty="0"/>
+          </a:p>
+          <a:p>
+            <a:pPr indent="0" marL="0">
+              <a:lnSpc>
+                <a:spcPct val="130000"/>
+              </a:lnSpc>
+              <a:spcAft>
+                <a:spcPts val="1400"/>
+              </a:spcAft>
+              <a:buNone/>
+            </a:pPr>
+            <a:r>
+              <a:rPr lang="en-US" sz="1800" dirty="0">
+                <a:solidFill>
+                  <a:srgbClr val="1A1A1A"/>
+                </a:solidFill>
+                <a:latin typeface="Calibri" pitchFamily="34" charset="0"/>
+                <a:ea typeface="Calibri" pitchFamily="34" charset="-122"/>
+                <a:cs typeface="Calibri" pitchFamily="34" charset="-120"/>
+              </a:rPr>
+              <a:t>No costly bureaucracy — no army of planners needed to set production levels.</a:t>
             </a:r>
             <a:endParaRPr lang="en-US" sz="1800" dirty="0"/>
           </a:p>
@@ -3317,8 +3661,8 @@
         </p:nvSpPr>
         <p:spPr>
           <a:xfrm>
-            <a:off x="640080" y="548640"/>
-            <a:ext cx="10881360" cy="822960"/>
+            <a:off x="640080" y="502920"/>
+            <a:ext cx="10881360" cy="731520"/>
           </a:xfrm>
           <a:prstGeom prst="rect">
             <a:avLst/>
@@ -3334,7 +3678,7 @@
               <a:buNone/>
             </a:pPr>
             <a:r>
-              <a:rPr lang="en-US" sz="3200" b="1" dirty="0">
+              <a:rPr lang="en-US" sz="3000" b="1" dirty="0">
                 <a:solidFill>
                   <a:srgbClr val="1E2761"/>
                 </a:solidFill>
@@ -3342,22 +3686,83 @@
                 <a:ea typeface="Cambria" pitchFamily="34" charset="-122"/>
                 <a:cs typeface="Cambria" pitchFamily="34" charset="-120"/>
               </a:rPr>
-              <a:t>Recap</a:t>
-            </a:r>
-            <a:endParaRPr lang="en-US" sz="3200" dirty="0"/>
-          </a:p>
-        </p:txBody>
-      </p:sp>
-      <p:sp>
-        <p:nvSpPr>
-          <p:cNvPr id="3" name="Text 1"/>
-          <p:cNvSpPr/>
-          <p:nvPr/>
-        </p:nvSpPr>
-        <p:spPr>
-          <a:xfrm>
-            <a:off x="822960" y="1828800"/>
-            <a:ext cx="9875520" cy="4114800"/>
+              <a:t>Advantages in action</a:t>
+            </a:r>
+            <a:endParaRPr lang="en-US" sz="3000" dirty="0"/>
+          </a:p>
+        </p:txBody>
+      </p:sp>
+      <p:sp>
+        <p:nvSpPr>
+          <p:cNvPr id="3" name="Shape 1"/>
+          <p:cNvSpPr/>
+          <p:nvPr/>
+        </p:nvSpPr>
+        <p:spPr>
+          <a:xfrm>
+            <a:off x="640080" y="1554480"/>
+            <a:ext cx="5212080" cy="3931920"/>
+          </a:xfrm>
+          <a:prstGeom prst="roundRect">
+            <a:avLst>
+              <a:gd name="adj" fmla="val 2791"/>
+            </a:avLst>
+          </a:prstGeom>
+          <a:solidFill>
+            <a:srgbClr val="F4F5F7"/>
+          </a:solidFill>
+          <a:ln/>
+        </p:spPr>
+      </p:sp>
+      <p:sp>
+        <p:nvSpPr>
+          <p:cNvPr id="4" name="Text 2"/>
+          <p:cNvSpPr/>
+          <p:nvPr/>
+        </p:nvSpPr>
+        <p:spPr>
+          <a:xfrm>
+            <a:off x="914400" y="1783080"/>
+            <a:ext cx="4663440" cy="457200"/>
+          </a:xfrm>
+          <a:prstGeom prst="rect">
+            <a:avLst/>
+          </a:prstGeom>
+          <a:noFill/>
+          <a:ln/>
+        </p:spPr>
+        <p:txBody>
+          <a:bodyPr wrap="square" rtlCol="0" anchor="ctr"/>
+          <a:lstStyle/>
+          <a:p>
+            <a:pPr indent="0" marL="0">
+              <a:buNone/>
+            </a:pPr>
+            <a:r>
+              <a:rPr lang="en-US" sz="1800" b="1" dirty="0">
+                <a:solidFill>
+                  <a:srgbClr val="F96167"/>
+                </a:solidFill>
+                <a:latin typeface="Calibri" pitchFamily="34" charset="0"/>
+                <a:ea typeface="Calibri" pitchFamily="34" charset="-122"/>
+                <a:cs typeface="Calibri" pitchFamily="34" charset="-120"/>
+              </a:rPr>
+              <a:t>Efficiency &amp; choice</a:t>
+            </a:r>
+            <a:endParaRPr lang="en-US" sz="1800" dirty="0"/>
+          </a:p>
+        </p:txBody>
+      </p:sp>
+      <p:sp>
+        <p:nvSpPr>
+          <p:cNvPr id="5" name="Text 3"/>
+          <p:cNvSpPr/>
+          <p:nvPr/>
+        </p:nvSpPr>
+        <p:spPr>
+          <a:xfrm>
+            <a:off x="914400" y="2286000"/>
+            <a:ext cx="4663440" cy="3017520"/>
           </a:xfrm>
           <a:prstGeom prst="rect">
             <a:avLst/>
@@ -3373,13 +3778,10 @@
               <a:lnSpc>
                 <a:spcPct val="130000"/>
               </a:lnSpc>
-              <a:spcAft>
-                <a:spcPts val="1400"/>
-              </a:spcAft>
-              <a:buNone/>
-            </a:pPr>
-            <a:r>
-              <a:rPr lang="en-US" sz="1800" dirty="0">
+              <a:buNone/>
+            </a:pPr>
+            <a:r>
+              <a:rPr lang="en-US" sz="1500" dirty="0">
                 <a:solidFill>
                   <a:srgbClr val="1A1A1A"/>
                 </a:solidFill>
@@ -3387,45 +3789,28 @@
                 <a:ea typeface="Calibri" pitchFamily="34" charset="-122"/>
                 <a:cs typeface="Calibri" pitchFamily="34" charset="-120"/>
               </a:rPr>
-              <a:t>The price mechanism coordinates a market economy without central planning.</a:t>
-            </a:r>
-            <a:endParaRPr lang="en-US" sz="1800" dirty="0"/>
+              <a:t>Three 3D-print shops open near the padel club, all competing for Tom's customers.</a:t>
+            </a:r>
+            <a:endParaRPr lang="en-US" sz="1500" dirty="0"/>
           </a:p>
           <a:p>
             <a:pPr indent="0" marL="0">
               <a:lnSpc>
                 <a:spcPct val="130000"/>
               </a:lnSpc>
-              <a:spcAft>
-                <a:spcPts val="1400"/>
-              </a:spcAft>
-              <a:buNone/>
-            </a:pPr>
-            <a:r>
-              <a:rPr lang="en-US" sz="1800" dirty="0">
-                <a:solidFill>
-                  <a:srgbClr val="1A1A1A"/>
-                </a:solidFill>
-                <a:latin typeface="Calibri" pitchFamily="34" charset="0"/>
-                <a:ea typeface="Calibri" pitchFamily="34" charset="-122"/>
-                <a:cs typeface="Calibri" pitchFamily="34" charset="-120"/>
-              </a:rPr>
-              <a:t>Characteristics: private ownership, profit motive, freedom of choice, competition, minimal government role.</a:t>
-            </a:r>
-            <a:endParaRPr lang="en-US" sz="1800" dirty="0"/>
+              <a:buNone/>
+            </a:pPr>
+            <a:endParaRPr lang="en-US" sz="1500" dirty="0"/>
           </a:p>
           <a:p>
             <a:pPr indent="0" marL="0">
               <a:lnSpc>
                 <a:spcPct val="130000"/>
               </a:lnSpc>
-              <a:spcAft>
-                <a:spcPts val="1400"/>
-              </a:spcAft>
-              <a:buNone/>
-            </a:pPr>
-            <a:r>
-              <a:rPr lang="en-US" sz="1800" dirty="0">
+              <a:buNone/>
+            </a:pPr>
+            <a:r>
+              <a:rPr lang="en-US" sz="1500" dirty="0">
                 <a:solidFill>
                   <a:srgbClr val="1A1A1A"/>
                 </a:solidFill>
@@ -3433,9 +3818,141 @@
                 <a:ea typeface="Calibri" pitchFamily="34" charset="-122"/>
                 <a:cs typeface="Calibri" pitchFamily="34" charset="-120"/>
               </a:rPr>
-              <a:t>Strengths: efficiency, choice, innovation. Weaknesses: inequality, public goods, externalities, monopoly risk.</a:t>
+              <a:t>Competition usually means lower prices and better quality for buyers.</a:t>
+            </a:r>
+            <a:endParaRPr lang="en-US" sz="1500" dirty="0"/>
+          </a:p>
+        </p:txBody>
+      </p:sp>
+      <p:sp>
+        <p:nvSpPr>
+          <p:cNvPr id="6" name="Shape 4"/>
+          <p:cNvSpPr/>
+          <p:nvPr/>
+        </p:nvSpPr>
+        <p:spPr>
+          <a:xfrm>
+            <a:off x="6126480" y="1554480"/>
+            <a:ext cx="5212080" cy="3931920"/>
+          </a:xfrm>
+          <a:prstGeom prst="roundRect">
+            <a:avLst>
+              <a:gd name="adj" fmla="val 2791"/>
+            </a:avLst>
+          </a:prstGeom>
+          <a:solidFill>
+            <a:srgbClr val="F4F5F7"/>
+          </a:solidFill>
+          <a:ln/>
+        </p:spPr>
+      </p:sp>
+      <p:sp>
+        <p:nvSpPr>
+          <p:cNvPr id="7" name="Text 5"/>
+          <p:cNvSpPr/>
+          <p:nvPr/>
+        </p:nvSpPr>
+        <p:spPr>
+          <a:xfrm>
+            <a:off x="6400800" y="1783080"/>
+            <a:ext cx="4663440" cy="457200"/>
+          </a:xfrm>
+          <a:prstGeom prst="rect">
+            <a:avLst/>
+          </a:prstGeom>
+          <a:noFill/>
+          <a:ln/>
+        </p:spPr>
+        <p:txBody>
+          <a:bodyPr wrap="square" rtlCol="0" anchor="ctr"/>
+          <a:lstStyle/>
+          <a:p>
+            <a:pPr indent="0" marL="0">
+              <a:buNone/>
+            </a:pPr>
+            <a:r>
+              <a:rPr lang="en-US" sz="1800" b="1" dirty="0">
+                <a:solidFill>
+                  <a:srgbClr val="D98C00"/>
+                </a:solidFill>
+                <a:latin typeface="Calibri" pitchFamily="34" charset="0"/>
+                <a:ea typeface="Calibri" pitchFamily="34" charset="-122"/>
+                <a:cs typeface="Calibri" pitchFamily="34" charset="-120"/>
+              </a:rPr>
+              <a:t>Innovation</a:t>
             </a:r>
             <a:endParaRPr lang="en-US" sz="1800" dirty="0"/>
+          </a:p>
+        </p:txBody>
+      </p:sp>
+      <p:sp>
+        <p:nvSpPr>
+          <p:cNvPr id="8" name="Text 6"/>
+          <p:cNvSpPr/>
+          <p:nvPr/>
+        </p:nvSpPr>
+        <p:spPr>
+          <a:xfrm>
+            <a:off x="6400800" y="2286000"/>
+            <a:ext cx="4663440" cy="3017520"/>
+          </a:xfrm>
+          <a:prstGeom prst="rect">
+            <a:avLst/>
+          </a:prstGeom>
+          <a:noFill/>
+          <a:ln/>
+        </p:spPr>
+        <p:txBody>
+          <a:bodyPr wrap="square" rtlCol="0" anchor="t"/>
+          <a:lstStyle/>
+          <a:p>
+            <a:pPr indent="0" marL="0">
+              <a:lnSpc>
+                <a:spcPct val="130000"/>
+              </a:lnSpc>
+              <a:buNone/>
+            </a:pPr>
+            <a:r>
+              <a:rPr lang="en-US" sz="1500" dirty="0">
+                <a:solidFill>
+                  <a:srgbClr val="1A1A1A"/>
+                </a:solidFill>
+                <a:latin typeface="Calibri" pitchFamily="34" charset="0"/>
+                <a:ea typeface="Calibri" pitchFamily="34" charset="-122"/>
+                <a:cs typeface="Calibri" pitchFamily="34" charset="-120"/>
+              </a:rPr>
+              <a:t>Tom redesigns his workflow to cut delivery from a week to two days — no government told him to.</a:t>
+            </a:r>
+            <a:endParaRPr lang="en-US" sz="1500" dirty="0"/>
+          </a:p>
+          <a:p>
+            <a:pPr indent="0" marL="0">
+              <a:lnSpc>
+                <a:spcPct val="130000"/>
+              </a:lnSpc>
+              <a:buNone/>
+            </a:pPr>
+            <a:endParaRPr lang="en-US" sz="1500" dirty="0"/>
+          </a:p>
+          <a:p>
+            <a:pPr indent="0" marL="0">
+              <a:lnSpc>
+                <a:spcPct val="130000"/>
+              </a:lnSpc>
+              <a:buNone/>
+            </a:pPr>
+            <a:r>
+              <a:rPr lang="en-US" sz="1500" dirty="0">
+                <a:solidFill>
+                  <a:srgbClr val="1A1A1A"/>
+                </a:solidFill>
+                <a:latin typeface="Calibri" pitchFamily="34" charset="0"/>
+                <a:ea typeface="Calibri" pitchFamily="34" charset="-122"/>
+                <a:cs typeface="Calibri" pitchFamily="34" charset="-120"/>
+              </a:rPr>
+              <a:t>The profit motive drove the improvement on his own initiative.</a:t>
+            </a:r>
+            <a:endParaRPr lang="en-US" sz="1500" dirty="0"/>
           </a:p>
         </p:txBody>
       </p:sp>
@@ -3450,6 +3967,872 @@
 <file path=ppt/slides/slide15.xml><?xml version="1.0" encoding="utf-8"?>
 <p:sld xmlns:a="http://schemas.openxmlformats.org/drawingml/2006/main" xmlns:r="http://schemas.openxmlformats.org/officeDocument/2006/relationships" xmlns:p="http://schemas.openxmlformats.org/presentationml/2006/main">
   <p:cSld name="Slide 15">
+    <p:bg>
+      <p:bgPr>
+        <a:solidFill>
+          <a:srgbClr val="FFFFFF"/>
+        </a:solidFill>
+      </p:bgPr>
+    </p:bg>
+    <p:spTree>
+      <p:nvGrpSpPr>
+        <p:cNvPr id="1" name=""/>
+        <p:cNvGrpSpPr/>
+        <p:nvPr/>
+      </p:nvGrpSpPr>
+      <p:grpSpPr>
+        <a:xfrm>
+          <a:off x="0" y="0"/>
+          <a:ext cx="0" cy="0"/>
+          <a:chOff x="0" y="0"/>
+          <a:chExt cx="0" cy="0"/>
+        </a:xfrm>
+      </p:grpSpPr>
+      <p:sp>
+        <p:nvSpPr>
+          <p:cNvPr id="2" name="Text 0"/>
+          <p:cNvSpPr/>
+          <p:nvPr/>
+        </p:nvSpPr>
+        <p:spPr>
+          <a:xfrm>
+            <a:off x="640080" y="548640"/>
+            <a:ext cx="10881360" cy="822960"/>
+          </a:xfrm>
+          <a:prstGeom prst="rect">
+            <a:avLst/>
+          </a:prstGeom>
+          <a:noFill/>
+          <a:ln/>
+        </p:spPr>
+        <p:txBody>
+          <a:bodyPr wrap="square" rtlCol="0" anchor="ctr"/>
+          <a:lstStyle/>
+          <a:p>
+            <a:pPr indent="0" marL="0">
+              <a:buNone/>
+            </a:pPr>
+            <a:r>
+              <a:rPr lang="en-US" sz="3200" b="1" dirty="0">
+                <a:solidFill>
+                  <a:srgbClr val="1E2761"/>
+                </a:solidFill>
+                <a:latin typeface="Cambria" pitchFamily="34" charset="0"/>
+                <a:ea typeface="Cambria" pitchFamily="34" charset="-122"/>
+                <a:cs typeface="Cambria" pitchFamily="34" charset="-120"/>
+              </a:rPr>
+              <a:t>Disadvantages of the market system</a:t>
+            </a:r>
+            <a:endParaRPr lang="en-US" sz="3200" dirty="0"/>
+          </a:p>
+        </p:txBody>
+      </p:sp>
+      <p:sp>
+        <p:nvSpPr>
+          <p:cNvPr id="3" name="Text 1"/>
+          <p:cNvSpPr/>
+          <p:nvPr/>
+        </p:nvSpPr>
+        <p:spPr>
+          <a:xfrm>
+            <a:off x="822960" y="1828800"/>
+            <a:ext cx="9875520" cy="4114800"/>
+          </a:xfrm>
+          <a:prstGeom prst="rect">
+            <a:avLst/>
+          </a:prstGeom>
+          <a:noFill/>
+          <a:ln/>
+        </p:spPr>
+        <p:txBody>
+          <a:bodyPr wrap="square" rtlCol="0" anchor="t"/>
+          <a:lstStyle/>
+          <a:p>
+            <a:pPr indent="0" marL="0">
+              <a:lnSpc>
+                <a:spcPct val="130000"/>
+              </a:lnSpc>
+              <a:spcAft>
+                <a:spcPts val="1400"/>
+              </a:spcAft>
+              <a:buNone/>
+            </a:pPr>
+            <a:r>
+              <a:rPr lang="en-US" sz="1800" dirty="0">
+                <a:solidFill>
+                  <a:srgbClr val="1A1A1A"/>
+                </a:solidFill>
+                <a:latin typeface="Calibri" pitchFamily="34" charset="0"/>
+                <a:ea typeface="Calibri" pitchFamily="34" charset="-122"/>
+                <a:cs typeface="Calibri" pitchFamily="34" charset="-120"/>
+              </a:rPr>
+              <a:t>Inequality — the market only responds to effective demand (want + ability to pay).</a:t>
+            </a:r>
+            <a:endParaRPr lang="en-US" sz="1800" dirty="0"/>
+          </a:p>
+          <a:p>
+            <a:pPr indent="0" marL="0">
+              <a:lnSpc>
+                <a:spcPct val="130000"/>
+              </a:lnSpc>
+              <a:spcAft>
+                <a:spcPts val="1400"/>
+              </a:spcAft>
+              <a:buNone/>
+            </a:pPr>
+            <a:r>
+              <a:rPr lang="en-US" sz="1800" dirty="0">
+                <a:solidFill>
+                  <a:srgbClr val="1A1A1A"/>
+                </a:solidFill>
+                <a:latin typeface="Calibri" pitchFamily="34" charset="0"/>
+                <a:ea typeface="Calibri" pitchFamily="34" charset="-122"/>
+                <a:cs typeface="Calibri" pitchFamily="34" charset="-120"/>
+              </a:rPr>
+              <a:t>Public goods under-provided — hard to charge individuals for things like street lighting.</a:t>
+            </a:r>
+            <a:endParaRPr lang="en-US" sz="1800" dirty="0"/>
+          </a:p>
+          <a:p>
+            <a:pPr indent="0" marL="0">
+              <a:lnSpc>
+                <a:spcPct val="130000"/>
+              </a:lnSpc>
+              <a:spcAft>
+                <a:spcPts val="1400"/>
+              </a:spcAft>
+              <a:buNone/>
+            </a:pPr>
+            <a:r>
+              <a:rPr lang="en-US" sz="1800" dirty="0">
+                <a:solidFill>
+                  <a:srgbClr val="1A1A1A"/>
+                </a:solidFill>
+                <a:latin typeface="Calibri" pitchFamily="34" charset="0"/>
+                <a:ea typeface="Calibri" pitchFamily="34" charset="-122"/>
+                <a:cs typeface="Calibri" pitchFamily="34" charset="-120"/>
+              </a:rPr>
+              <a:t>Externalities ignored — market price often leaves out spillover costs, like pollution.</a:t>
+            </a:r>
+            <a:endParaRPr lang="en-US" sz="1800" dirty="0"/>
+          </a:p>
+          <a:p>
+            <a:pPr indent="0" marL="0">
+              <a:lnSpc>
+                <a:spcPct val="130000"/>
+              </a:lnSpc>
+              <a:spcAft>
+                <a:spcPts val="1400"/>
+              </a:spcAft>
+              <a:buNone/>
+            </a:pPr>
+            <a:r>
+              <a:rPr lang="en-US" sz="1800" dirty="0">
+                <a:solidFill>
+                  <a:srgbClr val="1A1A1A"/>
+                </a:solidFill>
+                <a:latin typeface="Calibri" pitchFamily="34" charset="0"/>
+                <a:ea typeface="Calibri" pitchFamily="34" charset="-122"/>
+                <a:cs typeface="Calibri" pitchFamily="34" charset="-120"/>
+              </a:rPr>
+              <a:t>Monopoly power — a dominant firm can raise prices and cut quality unchallenged.</a:t>
+            </a:r>
+            <a:endParaRPr lang="en-US" sz="1800" dirty="0"/>
+          </a:p>
+        </p:txBody>
+      </p:sp>
+    </p:spTree>
+  </p:cSld>
+  <p:clrMapOvr>
+    <a:masterClrMapping/>
+  </p:clrMapOvr>
+</p:sld>
+</file>
+
+<file path=ppt/slides/slide16.xml><?xml version="1.0" encoding="utf-8"?>
+<p:sld xmlns:a="http://schemas.openxmlformats.org/drawingml/2006/main" xmlns:r="http://schemas.openxmlformats.org/officeDocument/2006/relationships" xmlns:p="http://schemas.openxmlformats.org/presentationml/2006/main">
+  <p:cSld name="Slide 16">
+    <p:bg>
+      <p:bgPr>
+        <a:solidFill>
+          <a:srgbClr val="FFFFFF"/>
+        </a:solidFill>
+      </p:bgPr>
+    </p:bg>
+    <p:spTree>
+      <p:nvGrpSpPr>
+        <p:cNvPr id="1" name=""/>
+        <p:cNvGrpSpPr/>
+        <p:nvPr/>
+      </p:nvGrpSpPr>
+      <p:grpSpPr>
+        <a:xfrm>
+          <a:off x="0" y="0"/>
+          <a:ext cx="0" cy="0"/>
+          <a:chOff x="0" y="0"/>
+          <a:chExt cx="0" cy="0"/>
+        </a:xfrm>
+      </p:grpSpPr>
+      <p:sp>
+        <p:nvSpPr>
+          <p:cNvPr id="2" name="Text 0"/>
+          <p:cNvSpPr/>
+          <p:nvPr/>
+        </p:nvSpPr>
+        <p:spPr>
+          <a:xfrm>
+            <a:off x="640080" y="548640"/>
+            <a:ext cx="10881360" cy="731520"/>
+          </a:xfrm>
+          <a:prstGeom prst="rect">
+            <a:avLst/>
+          </a:prstGeom>
+          <a:noFill/>
+          <a:ln/>
+        </p:spPr>
+        <p:txBody>
+          <a:bodyPr wrap="square" rtlCol="0" anchor="ctr"/>
+          <a:lstStyle/>
+          <a:p>
+            <a:pPr indent="0" marL="0">
+              <a:buNone/>
+            </a:pPr>
+            <a:r>
+              <a:rPr lang="en-US" sz="3000" b="1" dirty="0">
+                <a:solidFill>
+                  <a:srgbClr val="1E2761"/>
+                </a:solidFill>
+                <a:latin typeface="Cambria" pitchFamily="34" charset="0"/>
+                <a:ea typeface="Cambria" pitchFamily="34" charset="-122"/>
+                <a:cs typeface="Cambria" pitchFamily="34" charset="-120"/>
+              </a:rPr>
+              <a:t>Disadvantages in action</a:t>
+            </a:r>
+            <a:endParaRPr lang="en-US" sz="3000" dirty="0"/>
+          </a:p>
+        </p:txBody>
+      </p:sp>
+      <p:sp>
+        <p:nvSpPr>
+          <p:cNvPr id="3" name="Shape 1"/>
+          <p:cNvSpPr/>
+          <p:nvPr/>
+        </p:nvSpPr>
+        <p:spPr>
+          <a:xfrm>
+            <a:off x="790956" y="1828800"/>
+            <a:ext cx="3291840" cy="3108960"/>
+          </a:xfrm>
+          <a:prstGeom prst="roundRect">
+            <a:avLst>
+              <a:gd name="adj" fmla="val 3529"/>
+            </a:avLst>
+          </a:prstGeom>
+          <a:solidFill>
+            <a:srgbClr val="F4F5F7"/>
+          </a:solidFill>
+          <a:ln/>
+        </p:spPr>
+      </p:sp>
+      <p:sp>
+        <p:nvSpPr>
+          <p:cNvPr id="4" name="Text 2"/>
+          <p:cNvSpPr/>
+          <p:nvPr/>
+        </p:nvSpPr>
+        <p:spPr>
+          <a:xfrm>
+            <a:off x="1065276" y="2103120"/>
+            <a:ext cx="2743200" cy="548640"/>
+          </a:xfrm>
+          <a:prstGeom prst="rect">
+            <a:avLst/>
+          </a:prstGeom>
+          <a:noFill/>
+          <a:ln/>
+        </p:spPr>
+        <p:txBody>
+          <a:bodyPr wrap="square" rtlCol="0" anchor="ctr"/>
+          <a:lstStyle/>
+          <a:p>
+            <a:pPr indent="0" marL="0">
+              <a:buNone/>
+            </a:pPr>
+            <a:r>
+              <a:rPr lang="en-US" sz="1600" b="1" dirty="0">
+                <a:solidFill>
+                  <a:srgbClr val="1E2761"/>
+                </a:solidFill>
+                <a:latin typeface="Calibri" pitchFamily="34" charset="0"/>
+                <a:ea typeface="Calibri" pitchFamily="34" charset="-122"/>
+                <a:cs typeface="Calibri" pitchFamily="34" charset="-120"/>
+              </a:rPr>
+              <a:t>Externality</a:t>
+            </a:r>
+            <a:endParaRPr lang="en-US" sz="1600" dirty="0"/>
+          </a:p>
+        </p:txBody>
+      </p:sp>
+      <p:sp>
+        <p:nvSpPr>
+          <p:cNvPr id="5" name="Text 3"/>
+          <p:cNvSpPr/>
+          <p:nvPr/>
+        </p:nvSpPr>
+        <p:spPr>
+          <a:xfrm>
+            <a:off x="1065276" y="2697480"/>
+            <a:ext cx="2743200" cy="2011680"/>
+          </a:xfrm>
+          <a:prstGeom prst="rect">
+            <a:avLst/>
+          </a:prstGeom>
+          <a:noFill/>
+          <a:ln/>
+        </p:spPr>
+        <p:txBody>
+          <a:bodyPr wrap="square" rtlCol="0" anchor="t"/>
+          <a:lstStyle/>
+          <a:p>
+            <a:pPr indent="0" marL="0">
+              <a:lnSpc>
+                <a:spcPct val="125000"/>
+              </a:lnSpc>
+              <a:buNone/>
+            </a:pPr>
+            <a:r>
+              <a:rPr lang="en-US" sz="1250" dirty="0">
+                <a:solidFill>
+                  <a:srgbClr val="1A1A1A"/>
+                </a:solidFill>
+                <a:latin typeface="Calibri" pitchFamily="34" charset="0"/>
+                <a:ea typeface="Calibri" pitchFamily="34" charset="-122"/>
+                <a:cs typeface="Calibri" pitchFamily="34" charset="-120"/>
+              </a:rPr>
+              <a:t>Tom's printer produces plastic waste in a local stream — not reflected in the $8 grip price.</a:t>
+            </a:r>
+            <a:endParaRPr lang="en-US" sz="1250" dirty="0"/>
+          </a:p>
+        </p:txBody>
+      </p:sp>
+      <p:sp>
+        <p:nvSpPr>
+          <p:cNvPr id="6" name="Shape 4"/>
+          <p:cNvSpPr/>
+          <p:nvPr/>
+        </p:nvSpPr>
+        <p:spPr>
+          <a:xfrm>
+            <a:off x="4448556" y="1828800"/>
+            <a:ext cx="3291840" cy="3108960"/>
+          </a:xfrm>
+          <a:prstGeom prst="roundRect">
+            <a:avLst>
+              <a:gd name="adj" fmla="val 3529"/>
+            </a:avLst>
+          </a:prstGeom>
+          <a:solidFill>
+            <a:srgbClr val="F4F5F7"/>
+          </a:solidFill>
+          <a:ln/>
+        </p:spPr>
+      </p:sp>
+      <p:sp>
+        <p:nvSpPr>
+          <p:cNvPr id="7" name="Text 5"/>
+          <p:cNvSpPr/>
+          <p:nvPr/>
+        </p:nvSpPr>
+        <p:spPr>
+          <a:xfrm>
+            <a:off x="4722876" y="2103120"/>
+            <a:ext cx="2743200" cy="548640"/>
+          </a:xfrm>
+          <a:prstGeom prst="rect">
+            <a:avLst/>
+          </a:prstGeom>
+          <a:noFill/>
+          <a:ln/>
+        </p:spPr>
+        <p:txBody>
+          <a:bodyPr wrap="square" rtlCol="0" anchor="ctr"/>
+          <a:lstStyle/>
+          <a:p>
+            <a:pPr indent="0" marL="0">
+              <a:buNone/>
+            </a:pPr>
+            <a:r>
+              <a:rPr lang="en-US" sz="1600" b="1" dirty="0">
+                <a:solidFill>
+                  <a:srgbClr val="1E2761"/>
+                </a:solidFill>
+                <a:latin typeface="Calibri" pitchFamily="34" charset="0"/>
+                <a:ea typeface="Calibri" pitchFamily="34" charset="-122"/>
+                <a:cs typeface="Calibri" pitchFamily="34" charset="-120"/>
+              </a:rPr>
+              <a:t>Inequality</a:t>
+            </a:r>
+            <a:endParaRPr lang="en-US" sz="1600" dirty="0"/>
+          </a:p>
+        </p:txBody>
+      </p:sp>
+      <p:sp>
+        <p:nvSpPr>
+          <p:cNvPr id="8" name="Text 6"/>
+          <p:cNvSpPr/>
+          <p:nvPr/>
+        </p:nvSpPr>
+        <p:spPr>
+          <a:xfrm>
+            <a:off x="4722876" y="2697480"/>
+            <a:ext cx="2743200" cy="2011680"/>
+          </a:xfrm>
+          <a:prstGeom prst="rect">
+            <a:avLst/>
+          </a:prstGeom>
+          <a:noFill/>
+          <a:ln/>
+        </p:spPr>
+        <p:txBody>
+          <a:bodyPr wrap="square" rtlCol="0" anchor="t"/>
+          <a:lstStyle/>
+          <a:p>
+            <a:pPr indent="0" marL="0">
+              <a:lnSpc>
+                <a:spcPct val="125000"/>
+              </a:lnSpc>
+              <a:buNone/>
+            </a:pPr>
+            <a:r>
+              <a:rPr lang="en-US" sz="1250" dirty="0">
+                <a:solidFill>
+                  <a:srgbClr val="1A1A1A"/>
+                </a:solidFill>
+                <a:latin typeface="Calibri" pitchFamily="34" charset="0"/>
+                <a:ea typeface="Calibri" pitchFamily="34" charset="-122"/>
+                <a:cs typeface="Calibri" pitchFamily="34" charset="-120"/>
+              </a:rPr>
+              <a:t>A family that can't afford court fees wants to play — the market doesn't respond to that want.</a:t>
+            </a:r>
+            <a:endParaRPr lang="en-US" sz="1250" dirty="0"/>
+          </a:p>
+        </p:txBody>
+      </p:sp>
+      <p:sp>
+        <p:nvSpPr>
+          <p:cNvPr id="9" name="Shape 7"/>
+          <p:cNvSpPr/>
+          <p:nvPr/>
+        </p:nvSpPr>
+        <p:spPr>
+          <a:xfrm>
+            <a:off x="8106156" y="1828800"/>
+            <a:ext cx="3291840" cy="3108960"/>
+          </a:xfrm>
+          <a:prstGeom prst="roundRect">
+            <a:avLst>
+              <a:gd name="adj" fmla="val 3529"/>
+            </a:avLst>
+          </a:prstGeom>
+          <a:solidFill>
+            <a:srgbClr val="F4F5F7"/>
+          </a:solidFill>
+          <a:ln/>
+        </p:spPr>
+      </p:sp>
+      <p:sp>
+        <p:nvSpPr>
+          <p:cNvPr id="10" name="Text 8"/>
+          <p:cNvSpPr/>
+          <p:nvPr/>
+        </p:nvSpPr>
+        <p:spPr>
+          <a:xfrm>
+            <a:off x="8380476" y="2103120"/>
+            <a:ext cx="2743200" cy="548640"/>
+          </a:xfrm>
+          <a:prstGeom prst="rect">
+            <a:avLst/>
+          </a:prstGeom>
+          <a:noFill/>
+          <a:ln/>
+        </p:spPr>
+        <p:txBody>
+          <a:bodyPr wrap="square" rtlCol="0" anchor="ctr"/>
+          <a:lstStyle/>
+          <a:p>
+            <a:pPr indent="0" marL="0">
+              <a:buNone/>
+            </a:pPr>
+            <a:r>
+              <a:rPr lang="en-US" sz="1600" b="1" dirty="0">
+                <a:solidFill>
+                  <a:srgbClr val="1E2761"/>
+                </a:solidFill>
+                <a:latin typeface="Calibri" pitchFamily="34" charset="0"/>
+                <a:ea typeface="Calibri" pitchFamily="34" charset="-122"/>
+                <a:cs typeface="Calibri" pitchFamily="34" charset="-120"/>
+              </a:rPr>
+              <a:t>Public goods</a:t>
+            </a:r>
+            <a:endParaRPr lang="en-US" sz="1600" dirty="0"/>
+          </a:p>
+        </p:txBody>
+      </p:sp>
+      <p:sp>
+        <p:nvSpPr>
+          <p:cNvPr id="11" name="Text 9"/>
+          <p:cNvSpPr/>
+          <p:nvPr/>
+        </p:nvSpPr>
+        <p:spPr>
+          <a:xfrm>
+            <a:off x="8380476" y="2697480"/>
+            <a:ext cx="2743200" cy="2011680"/>
+          </a:xfrm>
+          <a:prstGeom prst="rect">
+            <a:avLst/>
+          </a:prstGeom>
+          <a:noFill/>
+          <a:ln/>
+        </p:spPr>
+        <p:txBody>
+          <a:bodyPr wrap="square" rtlCol="0" anchor="t"/>
+          <a:lstStyle/>
+          <a:p>
+            <a:pPr indent="0" marL="0">
+              <a:lnSpc>
+                <a:spcPct val="125000"/>
+              </a:lnSpc>
+              <a:buNone/>
+            </a:pPr>
+            <a:r>
+              <a:rPr lang="en-US" sz="1250" dirty="0">
+                <a:solidFill>
+                  <a:srgbClr val="1A1A1A"/>
+                </a:solidFill>
+                <a:latin typeface="Calibri" pitchFamily="34" charset="0"/>
+                <a:ea typeface="Calibri" pitchFamily="34" charset="-122"/>
+                <a:cs typeface="Calibri" pitchFamily="34" charset="-120"/>
+              </a:rPr>
+              <a:t>Nobody privately installs streetlights on the path to the club — no profit incentive to.</a:t>
+            </a:r>
+            <a:endParaRPr lang="en-US" sz="1250" dirty="0"/>
+          </a:p>
+        </p:txBody>
+      </p:sp>
+    </p:spTree>
+  </p:cSld>
+  <p:clrMapOvr>
+    <a:masterClrMapping/>
+  </p:clrMapOvr>
+</p:sld>
+</file>
+
+<file path=ppt/slides/slide17.xml><?xml version="1.0" encoding="utf-8"?>
+<p:sld xmlns:a="http://schemas.openxmlformats.org/drawingml/2006/main" xmlns:r="http://schemas.openxmlformats.org/officeDocument/2006/relationships" xmlns:p="http://schemas.openxmlformats.org/presentationml/2006/main">
+  <p:cSld name="Slide 17">
+    <p:bg>
+      <p:bgPr>
+        <a:solidFill>
+          <a:srgbClr val="FFFFFF"/>
+        </a:solidFill>
+      </p:bgPr>
+    </p:bg>
+    <p:spTree>
+      <p:nvGrpSpPr>
+        <p:cNvPr id="1" name=""/>
+        <p:cNvGrpSpPr/>
+        <p:nvPr/>
+      </p:nvGrpSpPr>
+      <p:grpSpPr>
+        <a:xfrm>
+          <a:off x="0" y="0"/>
+          <a:ext cx="0" cy="0"/>
+          <a:chOff x="0" y="0"/>
+          <a:chExt cx="0" cy="0"/>
+        </a:xfrm>
+      </p:grpSpPr>
+      <p:sp>
+        <p:nvSpPr>
+          <p:cNvPr id="2" name="Text 0"/>
+          <p:cNvSpPr/>
+          <p:nvPr/>
+        </p:nvSpPr>
+        <p:spPr>
+          <a:xfrm>
+            <a:off x="640080" y="548640"/>
+            <a:ext cx="10881360" cy="822960"/>
+          </a:xfrm>
+          <a:prstGeom prst="rect">
+            <a:avLst/>
+          </a:prstGeom>
+          <a:noFill/>
+          <a:ln/>
+        </p:spPr>
+        <p:txBody>
+          <a:bodyPr wrap="square" rtlCol="0" anchor="ctr"/>
+          <a:lstStyle/>
+          <a:p>
+            <a:pPr indent="0" marL="0">
+              <a:buNone/>
+            </a:pPr>
+            <a:r>
+              <a:rPr lang="en-US" sz="3200" b="1" dirty="0">
+                <a:solidFill>
+                  <a:srgbClr val="1E2761"/>
+                </a:solidFill>
+                <a:latin typeface="Cambria" pitchFamily="34" charset="0"/>
+                <a:ea typeface="Cambria" pitchFamily="34" charset="-122"/>
+                <a:cs typeface="Cambria" pitchFamily="34" charset="-120"/>
+              </a:rPr>
+              <a:t>Quick check</a:t>
+            </a:r>
+            <a:endParaRPr lang="en-US" sz="3200" dirty="0"/>
+          </a:p>
+        </p:txBody>
+      </p:sp>
+      <p:sp>
+        <p:nvSpPr>
+          <p:cNvPr id="3" name="Text 1"/>
+          <p:cNvSpPr/>
+          <p:nvPr/>
+        </p:nvSpPr>
+        <p:spPr>
+          <a:xfrm>
+            <a:off x="822960" y="1828800"/>
+            <a:ext cx="9875520" cy="4114800"/>
+          </a:xfrm>
+          <a:prstGeom prst="rect">
+            <a:avLst/>
+          </a:prstGeom>
+          <a:noFill/>
+          <a:ln/>
+        </p:spPr>
+        <p:txBody>
+          <a:bodyPr wrap="square" rtlCol="0" anchor="t"/>
+          <a:lstStyle/>
+          <a:p>
+            <a:pPr indent="0" marL="0">
+              <a:lnSpc>
+                <a:spcPct val="130000"/>
+              </a:lnSpc>
+              <a:spcAft>
+                <a:spcPts val="1400"/>
+              </a:spcAft>
+              <a:buNone/>
+            </a:pPr>
+            <a:r>
+              <a:rPr lang="en-US" sz="1800" dirty="0">
+                <a:solidFill>
+                  <a:srgbClr val="1A1A1A"/>
+                </a:solidFill>
+                <a:latin typeface="Calibri" pitchFamily="34" charset="0"/>
+                <a:ea typeface="Calibri" pitchFamily="34" charset="-122"/>
+                <a:cs typeface="Calibri" pitchFamily="34" charset="-120"/>
+              </a:rPr>
+              <a:t>In a market economy, who decides who goods actually go to?</a:t>
+            </a:r>
+            <a:endParaRPr lang="en-US" sz="1800" dirty="0"/>
+          </a:p>
+          <a:p>
+            <a:pPr indent="0" marL="0">
+              <a:lnSpc>
+                <a:spcPct val="130000"/>
+              </a:lnSpc>
+              <a:spcAft>
+                <a:spcPts val="1400"/>
+              </a:spcAft>
+              <a:buNone/>
+            </a:pPr>
+            <a:r>
+              <a:rPr lang="en-US" sz="1800" dirty="0">
+                <a:solidFill>
+                  <a:srgbClr val="1A1A1A"/>
+                </a:solidFill>
+                <a:latin typeface="Calibri" pitchFamily="34" charset="0"/>
+                <a:ea typeface="Calibri" pitchFamily="34" charset="-122"/>
+                <a:cs typeface="Calibri" pitchFamily="34" charset="-120"/>
+              </a:rPr>
+              <a:t>Does a pure market system automatically account for pollution costs?</a:t>
+            </a:r>
+            <a:endParaRPr lang="en-US" sz="1800" dirty="0"/>
+          </a:p>
+        </p:txBody>
+      </p:sp>
+    </p:spTree>
+  </p:cSld>
+  <p:clrMapOvr>
+    <a:masterClrMapping/>
+  </p:clrMapOvr>
+</p:sld>
+</file>
+
+<file path=ppt/slides/slide18.xml><?xml version="1.0" encoding="utf-8"?>
+<p:sld xmlns:a="http://schemas.openxmlformats.org/drawingml/2006/main" xmlns:r="http://schemas.openxmlformats.org/officeDocument/2006/relationships" xmlns:p="http://schemas.openxmlformats.org/presentationml/2006/main">
+  <p:cSld name="Slide 18">
+    <p:bg>
+      <p:bgPr>
+        <a:solidFill>
+          <a:srgbClr val="FFFFFF"/>
+        </a:solidFill>
+      </p:bgPr>
+    </p:bg>
+    <p:spTree>
+      <p:nvGrpSpPr>
+        <p:cNvPr id="1" name=""/>
+        <p:cNvGrpSpPr/>
+        <p:nvPr/>
+      </p:nvGrpSpPr>
+      <p:grpSpPr>
+        <a:xfrm>
+          <a:off x="0" y="0"/>
+          <a:ext cx="0" cy="0"/>
+          <a:chOff x="0" y="0"/>
+          <a:chExt cx="0" cy="0"/>
+        </a:xfrm>
+      </p:grpSpPr>
+      <p:sp>
+        <p:nvSpPr>
+          <p:cNvPr id="2" name="Text 0"/>
+          <p:cNvSpPr/>
+          <p:nvPr/>
+        </p:nvSpPr>
+        <p:spPr>
+          <a:xfrm>
+            <a:off x="640080" y="548640"/>
+            <a:ext cx="10881360" cy="822960"/>
+          </a:xfrm>
+          <a:prstGeom prst="rect">
+            <a:avLst/>
+          </a:prstGeom>
+          <a:noFill/>
+          <a:ln/>
+        </p:spPr>
+        <p:txBody>
+          <a:bodyPr wrap="square" rtlCol="0" anchor="ctr"/>
+          <a:lstStyle/>
+          <a:p>
+            <a:pPr indent="0" marL="0">
+              <a:buNone/>
+            </a:pPr>
+            <a:r>
+              <a:rPr lang="en-US" sz="3200" b="1" dirty="0">
+                <a:solidFill>
+                  <a:srgbClr val="1E2761"/>
+                </a:solidFill>
+                <a:latin typeface="Cambria" pitchFamily="34" charset="0"/>
+                <a:ea typeface="Cambria" pitchFamily="34" charset="-122"/>
+                <a:cs typeface="Cambria" pitchFamily="34" charset="-120"/>
+              </a:rPr>
+              <a:t>Recap</a:t>
+            </a:r>
+            <a:endParaRPr lang="en-US" sz="3200" dirty="0"/>
+          </a:p>
+        </p:txBody>
+      </p:sp>
+      <p:sp>
+        <p:nvSpPr>
+          <p:cNvPr id="3" name="Text 1"/>
+          <p:cNvSpPr/>
+          <p:nvPr/>
+        </p:nvSpPr>
+        <p:spPr>
+          <a:xfrm>
+            <a:off x="822960" y="1828800"/>
+            <a:ext cx="9875520" cy="4114800"/>
+          </a:xfrm>
+          <a:prstGeom prst="rect">
+            <a:avLst/>
+          </a:prstGeom>
+          <a:noFill/>
+          <a:ln/>
+        </p:spPr>
+        <p:txBody>
+          <a:bodyPr wrap="square" rtlCol="0" anchor="t"/>
+          <a:lstStyle/>
+          <a:p>
+            <a:pPr indent="0" marL="0">
+              <a:lnSpc>
+                <a:spcPct val="130000"/>
+              </a:lnSpc>
+              <a:spcAft>
+                <a:spcPts val="1400"/>
+              </a:spcAft>
+              <a:buNone/>
+            </a:pPr>
+            <a:r>
+              <a:rPr lang="en-US" sz="1800" dirty="0">
+                <a:solidFill>
+                  <a:srgbClr val="1A1A1A"/>
+                </a:solidFill>
+                <a:latin typeface="Calibri" pitchFamily="34" charset="0"/>
+                <a:ea typeface="Calibri" pitchFamily="34" charset="-122"/>
+                <a:cs typeface="Calibri" pitchFamily="34" charset="-120"/>
+              </a:rPr>
+              <a:t>The price mechanism coordinates a market economy without central planning.</a:t>
+            </a:r>
+            <a:endParaRPr lang="en-US" sz="1800" dirty="0"/>
+          </a:p>
+          <a:p>
+            <a:pPr indent="0" marL="0">
+              <a:lnSpc>
+                <a:spcPct val="130000"/>
+              </a:lnSpc>
+              <a:spcAft>
+                <a:spcPts val="1400"/>
+              </a:spcAft>
+              <a:buNone/>
+            </a:pPr>
+            <a:r>
+              <a:rPr lang="en-US" sz="1800" dirty="0">
+                <a:solidFill>
+                  <a:srgbClr val="1A1A1A"/>
+                </a:solidFill>
+                <a:latin typeface="Calibri" pitchFamily="34" charset="0"/>
+                <a:ea typeface="Calibri" pitchFamily="34" charset="-122"/>
+                <a:cs typeface="Calibri" pitchFamily="34" charset="-120"/>
+              </a:rPr>
+              <a:t>Characteristics: private ownership, profit motive, freedom of choice, competition, minimal government role.</a:t>
+            </a:r>
+            <a:endParaRPr lang="en-US" sz="1800" dirty="0"/>
+          </a:p>
+          <a:p>
+            <a:pPr indent="0" marL="0">
+              <a:lnSpc>
+                <a:spcPct val="130000"/>
+              </a:lnSpc>
+              <a:spcAft>
+                <a:spcPts val="1400"/>
+              </a:spcAft>
+              <a:buNone/>
+            </a:pPr>
+            <a:r>
+              <a:rPr lang="en-US" sz="1800" dirty="0">
+                <a:solidFill>
+                  <a:srgbClr val="1A1A1A"/>
+                </a:solidFill>
+                <a:latin typeface="Calibri" pitchFamily="34" charset="0"/>
+                <a:ea typeface="Calibri" pitchFamily="34" charset="-122"/>
+                <a:cs typeface="Calibri" pitchFamily="34" charset="-120"/>
+              </a:rPr>
+              <a:t>Strengths: efficiency, choice, innovation. Weaknesses: inequality, public goods, externalities, monopoly risk.</a:t>
+            </a:r>
+            <a:endParaRPr lang="en-US" sz="1800" dirty="0"/>
+          </a:p>
+        </p:txBody>
+      </p:sp>
+    </p:spTree>
+  </p:cSld>
+  <p:clrMapOvr>
+    <a:masterClrMapping/>
+  </p:clrMapOvr>
+</p:sld>
+</file>
+
+<file path=ppt/slides/slide19.xml><?xml version="1.0" encoding="utf-8"?>
+<p:sld xmlns:a="http://schemas.openxmlformats.org/drawingml/2006/main" xmlns:r="http://schemas.openxmlformats.org/officeDocument/2006/relationships" xmlns:p="http://schemas.openxmlformats.org/presentationml/2006/main">
+  <p:cSld name="Slide 19">
     <p:bg>
       <p:bgPr>
         <a:solidFill>
@@ -3761,14 +5144,38 @@
       </p:grpSpPr>
       <p:sp>
         <p:nvSpPr>
-          <p:cNvPr id="2" name="Text 0"/>
-          <p:cNvSpPr/>
-          <p:nvPr/>
-        </p:nvSpPr>
-        <p:spPr>
-          <a:xfrm>
-            <a:off x="640080" y="548640"/>
-            <a:ext cx="10881360" cy="822960"/>
+          <p:cNvPr id="2" name="Shape 0"/>
+          <p:cNvSpPr/>
+          <p:nvPr/>
+        </p:nvSpPr>
+        <p:spPr>
+          <a:xfrm>
+            <a:off x="640080" y="502920"/>
+            <a:ext cx="1527048" cy="365760"/>
+          </a:xfrm>
+          <a:prstGeom prst="roundRect">
+            <a:avLst>
+              <a:gd name="adj" fmla="val 50000"/>
+            </a:avLst>
+          </a:prstGeom>
+          <a:solidFill>
+            <a:srgbClr val="F96167">
+              <a:alpha val="18000"/>
+            </a:srgbClr>
+          </a:solidFill>
+          <a:ln/>
+        </p:spPr>
+      </p:sp>
+      <p:sp>
+        <p:nvSpPr>
+          <p:cNvPr id="3" name="Text 1"/>
+          <p:cNvSpPr/>
+          <p:nvPr/>
+        </p:nvSpPr>
+        <p:spPr>
+          <a:xfrm>
+            <a:off x="640080" y="502920"/>
+            <a:ext cx="1527048" cy="365760"/>
           </a:xfrm>
           <a:prstGeom prst="rect">
             <a:avLst/>
@@ -3780,34 +5187,134 @@
           <a:bodyPr wrap="square" rtlCol="0" anchor="ctr"/>
           <a:lstStyle/>
           <a:p>
-            <a:pPr indent="0" marL="0">
-              <a:buNone/>
-            </a:pPr>
-            <a:r>
-              <a:rPr lang="en-US" sz="3200" b="1" dirty="0">
+            <a:pPr algn="ctr" indent="0" marL="0">
+              <a:buNone/>
+            </a:pPr>
+            <a:r>
+              <a:rPr lang="en-US" sz="1200" b="1" dirty="0">
+                <a:solidFill>
+                  <a:srgbClr val="F96167"/>
+                </a:solidFill>
+                <a:latin typeface="Calibri" pitchFamily="34" charset="0"/>
+                <a:ea typeface="Calibri" pitchFamily="34" charset="-122"/>
+                <a:cs typeface="Calibri" pitchFamily="34" charset="-120"/>
+              </a:rPr>
+              <a:t>✍️ Your turn</a:t>
+            </a:r>
+            <a:endParaRPr lang="en-US" sz="1200" dirty="0"/>
+          </a:p>
+        </p:txBody>
+      </p:sp>
+      <p:sp>
+        <p:nvSpPr>
+          <p:cNvPr id="4" name="Text 2"/>
+          <p:cNvSpPr/>
+          <p:nvPr/>
+        </p:nvSpPr>
+        <p:spPr>
+          <a:xfrm>
+            <a:off x="640080" y="1051560"/>
+            <a:ext cx="10881360" cy="548640"/>
+          </a:xfrm>
+          <a:prstGeom prst="rect">
+            <a:avLst/>
+          </a:prstGeom>
+          <a:noFill/>
+          <a:ln/>
+        </p:spPr>
+        <p:txBody>
+          <a:bodyPr wrap="square" rtlCol="0" anchor="ctr"/>
+          <a:lstStyle/>
+          <a:p>
+            <a:pPr indent="0" marL="0">
+              <a:buNone/>
+            </a:pPr>
+            <a:r>
+              <a:rPr lang="en-US" sz="2200" b="1" dirty="0">
                 <a:solidFill>
                   <a:srgbClr val="1E2761"/>
                 </a:solidFill>
-                <a:latin typeface="Cambria" pitchFamily="34" charset="0"/>
-                <a:ea typeface="Cambria" pitchFamily="34" charset="-122"/>
-                <a:cs typeface="Cambria" pitchFamily="34" charset="-120"/>
-              </a:rPr>
-              <a:t>Nobody's in charge — so how does it work?</a:t>
-            </a:r>
-            <a:endParaRPr lang="en-US" sz="3200" dirty="0"/>
-          </a:p>
-        </p:txBody>
-      </p:sp>
-      <p:sp>
-        <p:nvSpPr>
-          <p:cNvPr id="3" name="Text 1"/>
-          <p:cNvSpPr/>
-          <p:nvPr/>
-        </p:nvSpPr>
-        <p:spPr>
-          <a:xfrm>
-            <a:off x="822960" y="1828800"/>
-            <a:ext cx="9875520" cy="4114800"/>
+                <a:latin typeface="Calibri" pitchFamily="34" charset="0"/>
+                <a:ea typeface="Calibri" pitchFamily="34" charset="-122"/>
+                <a:cs typeface="Calibri" pitchFamily="34" charset="-120"/>
+              </a:rPr>
+              <a:t>👜 Warm-up: padel club tote bag</a:t>
+            </a:r>
+            <a:endParaRPr lang="en-US" sz="2200" dirty="0"/>
+          </a:p>
+        </p:txBody>
+      </p:sp>
+      <p:sp>
+        <p:nvSpPr>
+          <p:cNvPr id="5" name="Shape 3"/>
+          <p:cNvSpPr/>
+          <p:nvPr/>
+        </p:nvSpPr>
+        <p:spPr>
+          <a:xfrm>
+            <a:off x="3566160" y="1920240"/>
+            <a:ext cx="5029200" cy="3108960"/>
+          </a:xfrm>
+          <a:prstGeom prst="roundRect">
+            <a:avLst>
+              <a:gd name="adj" fmla="val 4118"/>
+            </a:avLst>
+          </a:prstGeom>
+          <a:solidFill>
+            <a:srgbClr val="F4F5F7"/>
+          </a:solidFill>
+          <a:ln/>
+        </p:spPr>
+      </p:sp>
+      <p:sp>
+        <p:nvSpPr>
+          <p:cNvPr id="6" name="Text 4"/>
+          <p:cNvSpPr/>
+          <p:nvPr/>
+        </p:nvSpPr>
+        <p:spPr>
+          <a:xfrm>
+            <a:off x="3840480" y="2194560"/>
+            <a:ext cx="4480560" cy="365760"/>
+          </a:xfrm>
+          <a:prstGeom prst="rect">
+            <a:avLst/>
+          </a:prstGeom>
+          <a:noFill/>
+          <a:ln/>
+        </p:spPr>
+        <p:txBody>
+          <a:bodyPr wrap="square" rtlCol="0" anchor="ctr"/>
+          <a:lstStyle/>
+          <a:p>
+            <a:pPr indent="0" marL="0">
+              <a:buNone/>
+            </a:pPr>
+            <a:r>
+              <a:rPr lang="en-US" sz="1400" b="1" dirty="0">
+                <a:solidFill>
+                  <a:srgbClr val="5B5B5B"/>
+                </a:solidFill>
+                <a:latin typeface="Calibri" pitchFamily="34" charset="0"/>
+                <a:ea typeface="Calibri" pitchFamily="34" charset="-122"/>
+                <a:cs typeface="Calibri" pitchFamily="34" charset="-120"/>
+              </a:rPr>
+              <a:t>Your turn — PED practice</a:t>
+            </a:r>
+            <a:endParaRPr lang="en-US" sz="1400" dirty="0"/>
+          </a:p>
+        </p:txBody>
+      </p:sp>
+      <p:sp>
+        <p:nvSpPr>
+          <p:cNvPr id="7" name="Text 5"/>
+          <p:cNvSpPr/>
+          <p:nvPr/>
+        </p:nvSpPr>
+        <p:spPr>
+          <a:xfrm>
+            <a:off x="3840480" y="2651760"/>
+            <a:ext cx="4480560" cy="1280160"/>
           </a:xfrm>
           <a:prstGeom prst="rect">
             <a:avLst/>
@@ -3820,16 +5327,13 @@
           <a:lstStyle/>
           <a:p>
             <a:pPr indent="0" marL="0">
-              <a:lnSpc>
-                <a:spcPct val="130000"/>
-              </a:lnSpc>
               <a:spcAft>
-                <a:spcPts val="1400"/>
+                <a:spcPts val="800"/>
               </a:spcAft>
               <a:buNone/>
             </a:pPr>
             <a:r>
-              <a:rPr lang="en-US" sz="1800" dirty="0">
+              <a:rPr lang="en-US" sz="1500" dirty="0">
                 <a:solidFill>
                   <a:srgbClr val="1A1A1A"/>
                 </a:solidFill>
@@ -3837,22 +5341,19 @@
                 <a:ea typeface="Calibri" pitchFamily="34" charset="-122"/>
                 <a:cs typeface="Calibri" pitchFamily="34" charset="-120"/>
               </a:rPr>
-              <a:t>Nobody at Tom's Print Co has ever received a government order saying "make 60 grips this week, price them at $8."</a:t>
-            </a:r>
-            <a:endParaRPr lang="en-US" sz="1800" dirty="0"/>
-          </a:p>
-          <a:p>
-            <a:pPr indent="0" marL="0">
-              <a:lnSpc>
-                <a:spcPct val="130000"/>
-              </a:lnSpc>
+              <a:t>Price: $12 → $15  (+25%)</a:t>
+            </a:r>
+            <a:endParaRPr lang="en-US" sz="1500" dirty="0"/>
+          </a:p>
+          <a:p>
+            <a:pPr indent="0" marL="0">
               <a:spcAft>
-                <a:spcPts val="1400"/>
+                <a:spcPts val="800"/>
               </a:spcAft>
               <a:buNone/>
             </a:pPr>
             <a:r>
-              <a:rPr lang="en-US" sz="1800" dirty="0">
+              <a:rPr lang="en-US" sz="1500" dirty="0">
                 <a:solidFill>
                   <a:srgbClr val="1A1A1A"/>
                 </a:solidFill>
@@ -3860,22 +5361,61 @@
                 <a:ea typeface="Calibri" pitchFamily="34" charset="-122"/>
                 <a:cs typeface="Calibri" pitchFamily="34" charset="-120"/>
               </a:rPr>
-              <a:t>Nobody told the padel club how many courts to build.</a:t>
-            </a:r>
-            <a:endParaRPr lang="en-US" sz="1800" dirty="0"/>
-          </a:p>
-          <a:p>
-            <a:pPr indent="0" marL="0">
-              <a:lnSpc>
-                <a:spcPct val="130000"/>
-              </a:lnSpc>
-              <a:spcAft>
-                <a:spcPts val="1400"/>
-              </a:spcAft>
-              <a:buNone/>
-            </a:pPr>
-            <a:r>
-              <a:rPr lang="en-US" sz="1800" dirty="0">
+              <a:t>Quantity: 50 → 30 per month  (−40%)</a:t>
+            </a:r>
+            <a:endParaRPr lang="en-US" sz="1500" dirty="0"/>
+          </a:p>
+        </p:txBody>
+      </p:sp>
+      <p:sp>
+        <p:nvSpPr>
+          <p:cNvPr id="8" name="Shape 6"/>
+          <p:cNvSpPr/>
+          <p:nvPr/>
+        </p:nvSpPr>
+        <p:spPr>
+          <a:xfrm>
+            <a:off x="3840480" y="4343400"/>
+            <a:ext cx="1828800" cy="0"/>
+          </a:xfrm>
+          <a:prstGeom prst="line">
+            <a:avLst/>
+          </a:prstGeom>
+          <a:noFill/>
+          <a:ln w="19050">
+            <a:solidFill>
+              <a:srgbClr val="5B5B5B"/>
+            </a:solidFill>
+            <a:prstDash val="solid"/>
+          </a:ln>
+        </p:spPr>
+      </p:sp>
+      <p:sp>
+        <p:nvSpPr>
+          <p:cNvPr id="9" name="Text 7"/>
+          <p:cNvSpPr/>
+          <p:nvPr/>
+        </p:nvSpPr>
+        <p:spPr>
+          <a:xfrm>
+            <a:off x="3840480" y="3977640"/>
+            <a:ext cx="4206240" cy="320040"/>
+          </a:xfrm>
+          <a:prstGeom prst="rect">
+            <a:avLst/>
+          </a:prstGeom>
+          <a:noFill/>
+          <a:ln/>
+        </p:spPr>
+        <p:txBody>
+          <a:bodyPr wrap="square" rtlCol="0" anchor="ctr"/>
+          <a:lstStyle/>
+          <a:p>
+            <a:pPr indent="0" marL="0">
+              <a:buNone/>
+            </a:pPr>
+            <a:r>
+              <a:rPr lang="en-US" sz="1400" dirty="0">
                 <a:solidFill>
                   <a:srgbClr val="1A1A1A"/>
                 </a:solidFill>
@@ -3883,9 +5423,71 @@
                 <a:ea typeface="Calibri" pitchFamily="34" charset="-122"/>
                 <a:cs typeface="Calibri" pitchFamily="34" charset="-120"/>
               </a:rPr>
-              <a:t>Yet roughly the right amount of stuff gets made, priced, and sold. How?</a:t>
-            </a:r>
-            <a:endParaRPr lang="en-US" sz="1800" dirty="0"/>
+              <a:t>TR before = $____</a:t>
+            </a:r>
+            <a:endParaRPr lang="en-US" sz="1400" dirty="0"/>
+          </a:p>
+        </p:txBody>
+      </p:sp>
+      <p:sp>
+        <p:nvSpPr>
+          <p:cNvPr id="10" name="Shape 8"/>
+          <p:cNvSpPr/>
+          <p:nvPr/>
+        </p:nvSpPr>
+        <p:spPr>
+          <a:xfrm>
+            <a:off x="3840480" y="4709160"/>
+            <a:ext cx="1828800" cy="0"/>
+          </a:xfrm>
+          <a:prstGeom prst="line">
+            <a:avLst/>
+          </a:prstGeom>
+          <a:noFill/>
+          <a:ln w="19050">
+            <a:solidFill>
+              <a:srgbClr val="5B5B5B"/>
+            </a:solidFill>
+            <a:prstDash val="solid"/>
+          </a:ln>
+        </p:spPr>
+      </p:sp>
+      <p:sp>
+        <p:nvSpPr>
+          <p:cNvPr id="11" name="Text 9"/>
+          <p:cNvSpPr/>
+          <p:nvPr/>
+        </p:nvSpPr>
+        <p:spPr>
+          <a:xfrm>
+            <a:off x="3840480" y="4343400"/>
+            <a:ext cx="4206240" cy="320040"/>
+          </a:xfrm>
+          <a:prstGeom prst="rect">
+            <a:avLst/>
+          </a:prstGeom>
+          <a:noFill/>
+          <a:ln/>
+        </p:spPr>
+        <p:txBody>
+          <a:bodyPr wrap="square" rtlCol="0" anchor="ctr"/>
+          <a:lstStyle/>
+          <a:p>
+            <a:pPr indent="0" marL="0">
+              <a:buNone/>
+            </a:pPr>
+            <a:r>
+              <a:rPr lang="en-US" sz="1400" dirty="0">
+                <a:solidFill>
+                  <a:srgbClr val="1A1A1A"/>
+                </a:solidFill>
+                <a:latin typeface="Calibri" pitchFamily="34" charset="0"/>
+                <a:ea typeface="Calibri" pitchFamily="34" charset="-122"/>
+                <a:cs typeface="Calibri" pitchFamily="34" charset="-120"/>
+              </a:rPr>
+              <a:t>TR after = $____</a:t>
+            </a:r>
+            <a:endParaRPr lang="en-US" sz="1400" dirty="0"/>
           </a:p>
         </p:txBody>
       </p:sp>
@@ -3923,14 +5525,38 @@
       </p:grpSpPr>
       <p:sp>
         <p:nvSpPr>
-          <p:cNvPr id="2" name="Text 0"/>
-          <p:cNvSpPr/>
-          <p:nvPr/>
-        </p:nvSpPr>
-        <p:spPr>
-          <a:xfrm>
-            <a:off x="640080" y="548640"/>
-            <a:ext cx="10881360" cy="822960"/>
+          <p:cNvPr id="2" name="Shape 0"/>
+          <p:cNvSpPr/>
+          <p:nvPr/>
+        </p:nvSpPr>
+        <p:spPr>
+          <a:xfrm>
+            <a:off x="640080" y="502920"/>
+            <a:ext cx="1325880" cy="365760"/>
+          </a:xfrm>
+          <a:prstGeom prst="roundRect">
+            <a:avLst>
+              <a:gd name="adj" fmla="val 50000"/>
+            </a:avLst>
+          </a:prstGeom>
+          <a:solidFill>
+            <a:srgbClr val="1BAF7A">
+              <a:alpha val="18000"/>
+            </a:srgbClr>
+          </a:solidFill>
+          <a:ln/>
+        </p:spPr>
+      </p:sp>
+      <p:sp>
+        <p:nvSpPr>
+          <p:cNvPr id="3" name="Text 1"/>
+          <p:cNvSpPr/>
+          <p:nvPr/>
+        </p:nvSpPr>
+        <p:spPr>
+          <a:xfrm>
+            <a:off x="640080" y="502920"/>
+            <a:ext cx="1325880" cy="365760"/>
           </a:xfrm>
           <a:prstGeom prst="rect">
             <a:avLst/>
@@ -3942,110 +5568,220 @@
           <a:bodyPr wrap="square" rtlCol="0" anchor="ctr"/>
           <a:lstStyle/>
           <a:p>
-            <a:pPr indent="0" marL="0">
-              <a:buNone/>
-            </a:pPr>
-            <a:r>
-              <a:rPr lang="en-US" sz="3200" b="1" dirty="0">
+            <a:pPr algn="ctr" indent="0" marL="0">
+              <a:buNone/>
+            </a:pPr>
+            <a:r>
+              <a:rPr lang="en-US" sz="1200" b="1" dirty="0">
+                <a:solidFill>
+                  <a:srgbClr val="1BAF7A"/>
+                </a:solidFill>
+                <a:latin typeface="Calibri" pitchFamily="34" charset="0"/>
+                <a:ea typeface="Calibri" pitchFamily="34" charset="-122"/>
+                <a:cs typeface="Calibri" pitchFamily="34" charset="-120"/>
+              </a:rPr>
+              <a:t>✅ Revealed</a:t>
+            </a:r>
+            <a:endParaRPr lang="en-US" sz="1200" dirty="0"/>
+          </a:p>
+        </p:txBody>
+      </p:sp>
+      <p:sp>
+        <p:nvSpPr>
+          <p:cNvPr id="4" name="Text 2"/>
+          <p:cNvSpPr/>
+          <p:nvPr/>
+        </p:nvSpPr>
+        <p:spPr>
+          <a:xfrm>
+            <a:off x="640080" y="1051560"/>
+            <a:ext cx="10881360" cy="548640"/>
+          </a:xfrm>
+          <a:prstGeom prst="rect">
+            <a:avLst/>
+          </a:prstGeom>
+          <a:noFill/>
+          <a:ln/>
+        </p:spPr>
+        <p:txBody>
+          <a:bodyPr wrap="square" rtlCol="0" anchor="ctr"/>
+          <a:lstStyle/>
+          <a:p>
+            <a:pPr indent="0" marL="0">
+              <a:buNone/>
+            </a:pPr>
+            <a:r>
+              <a:rPr lang="en-US" sz="2200" b="1" dirty="0">
                 <a:solidFill>
                   <a:srgbClr val="1E2761"/>
+                </a:solidFill>
+                <a:latin typeface="Calibri" pitchFamily="34" charset="0"/>
+                <a:ea typeface="Calibri" pitchFamily="34" charset="-122"/>
+                <a:cs typeface="Calibri" pitchFamily="34" charset="-120"/>
+              </a:rPr>
+              <a:t>👜 Tote bag — answer</a:t>
+            </a:r>
+            <a:endParaRPr lang="en-US" sz="2200" dirty="0"/>
+          </a:p>
+        </p:txBody>
+      </p:sp>
+      <p:sp>
+        <p:nvSpPr>
+          <p:cNvPr id="5" name="Shape 3"/>
+          <p:cNvSpPr/>
+          <p:nvPr/>
+        </p:nvSpPr>
+        <p:spPr>
+          <a:xfrm>
+            <a:off x="3566160" y="1920240"/>
+            <a:ext cx="5029200" cy="3108960"/>
+          </a:xfrm>
+          <a:prstGeom prst="roundRect">
+            <a:avLst>
+              <a:gd name="adj" fmla="val 4118"/>
+            </a:avLst>
+          </a:prstGeom>
+          <a:solidFill>
+            <a:srgbClr val="F4F5F7"/>
+          </a:solidFill>
+          <a:ln/>
+        </p:spPr>
+      </p:sp>
+      <p:sp>
+        <p:nvSpPr>
+          <p:cNvPr id="6" name="Text 4"/>
+          <p:cNvSpPr/>
+          <p:nvPr/>
+        </p:nvSpPr>
+        <p:spPr>
+          <a:xfrm>
+            <a:off x="3840480" y="2194560"/>
+            <a:ext cx="4480560" cy="365760"/>
+          </a:xfrm>
+          <a:prstGeom prst="rect">
+            <a:avLst/>
+          </a:prstGeom>
+          <a:noFill/>
+          <a:ln/>
+        </p:spPr>
+        <p:txBody>
+          <a:bodyPr wrap="square" rtlCol="0" anchor="ctr"/>
+          <a:lstStyle/>
+          <a:p>
+            <a:pPr indent="0" marL="0">
+              <a:buNone/>
+            </a:pPr>
+            <a:r>
+              <a:rPr lang="en-US" sz="1400" b="1" dirty="0">
+                <a:solidFill>
+                  <a:srgbClr val="5B5B5B"/>
+                </a:solidFill>
+                <a:latin typeface="Calibri" pitchFamily="34" charset="0"/>
+                <a:ea typeface="Calibri" pitchFamily="34" charset="-122"/>
+                <a:cs typeface="Calibri" pitchFamily="34" charset="-120"/>
+              </a:rPr>
+              <a:t>Check your answer</a:t>
+            </a:r>
+            <a:endParaRPr lang="en-US" sz="1400" dirty="0"/>
+          </a:p>
+        </p:txBody>
+      </p:sp>
+      <p:sp>
+        <p:nvSpPr>
+          <p:cNvPr id="7" name="Text 5"/>
+          <p:cNvSpPr/>
+          <p:nvPr/>
+        </p:nvSpPr>
+        <p:spPr>
+          <a:xfrm>
+            <a:off x="3840480" y="2651760"/>
+            <a:ext cx="4480560" cy="1463040"/>
+          </a:xfrm>
+          <a:prstGeom prst="rect">
+            <a:avLst/>
+          </a:prstGeom>
+          <a:noFill/>
+          <a:ln/>
+        </p:spPr>
+        <p:txBody>
+          <a:bodyPr wrap="square" rtlCol="0" anchor="t"/>
+          <a:lstStyle/>
+          <a:p>
+            <a:pPr indent="0" marL="0">
+              <a:spcAft>
+                <a:spcPts val="600"/>
+              </a:spcAft>
+              <a:buNone/>
+            </a:pPr>
+            <a:r>
+              <a:rPr lang="en-US" sz="1500" dirty="0">
+                <a:solidFill>
+                  <a:srgbClr val="1A1A1A"/>
+                </a:solidFill>
+                <a:latin typeface="Calibri" pitchFamily="34" charset="0"/>
+                <a:ea typeface="Calibri" pitchFamily="34" charset="-122"/>
+                <a:cs typeface="Calibri" pitchFamily="34" charset="-120"/>
+              </a:rPr>
+              <a:t>% change in price = +25%</a:t>
+            </a:r>
+            <a:endParaRPr lang="en-US" sz="1500" dirty="0"/>
+          </a:p>
+          <a:p>
+            <a:pPr indent="0" marL="0">
+              <a:spcAft>
+                <a:spcPts val="600"/>
+              </a:spcAft>
+              <a:buNone/>
+            </a:pPr>
+            <a:r>
+              <a:rPr lang="en-US" sz="1500" dirty="0">
+                <a:solidFill>
+                  <a:srgbClr val="1A1A1A"/>
+                </a:solidFill>
+                <a:latin typeface="Calibri" pitchFamily="34" charset="0"/>
+                <a:ea typeface="Calibri" pitchFamily="34" charset="-122"/>
+                <a:cs typeface="Calibri" pitchFamily="34" charset="-120"/>
+              </a:rPr>
+              <a:t>% change in quantity = −40%</a:t>
+            </a:r>
+            <a:endParaRPr lang="en-US" sz="1500" dirty="0"/>
+          </a:p>
+        </p:txBody>
+      </p:sp>
+      <p:sp>
+        <p:nvSpPr>
+          <p:cNvPr id="8" name="Text 6"/>
+          <p:cNvSpPr/>
+          <p:nvPr/>
+        </p:nvSpPr>
+        <p:spPr>
+          <a:xfrm>
+            <a:off x="3840480" y="4206240"/>
+            <a:ext cx="4480560" cy="731520"/>
+          </a:xfrm>
+          <a:prstGeom prst="rect">
+            <a:avLst/>
+          </a:prstGeom>
+          <a:noFill/>
+          <a:ln/>
+        </p:spPr>
+        <p:txBody>
+          <a:bodyPr wrap="square" rtlCol="0" anchor="ctr"/>
+          <a:lstStyle/>
+          <a:p>
+            <a:pPr indent="0" marL="0">
+              <a:buNone/>
+            </a:pPr>
+            <a:r>
+              <a:rPr lang="en-US" sz="1800" b="1" dirty="0">
+                <a:solidFill>
+                  <a:srgbClr val="1BAF7A"/>
                 </a:solidFill>
                 <a:latin typeface="Cambria" pitchFamily="34" charset="0"/>
                 <a:ea typeface="Cambria" pitchFamily="34" charset="-122"/>
                 <a:cs typeface="Cambria" pitchFamily="34" charset="-120"/>
               </a:rPr>
-              <a:t>The price mechanism</a:t>
-            </a:r>
-            <a:endParaRPr lang="en-US" sz="3200" dirty="0"/>
-          </a:p>
-        </p:txBody>
-      </p:sp>
-      <p:sp>
-        <p:nvSpPr>
-          <p:cNvPr id="3" name="Text 1"/>
-          <p:cNvSpPr/>
-          <p:nvPr/>
-        </p:nvSpPr>
-        <p:spPr>
-          <a:xfrm>
-            <a:off x="822960" y="1828800"/>
-            <a:ext cx="9875520" cy="4114800"/>
-          </a:xfrm>
-          <a:prstGeom prst="rect">
-            <a:avLst/>
-          </a:prstGeom>
-          <a:noFill/>
-          <a:ln/>
-        </p:spPr>
-        <p:txBody>
-          <a:bodyPr wrap="square" rtlCol="0" anchor="t"/>
-          <a:lstStyle/>
-          <a:p>
-            <a:pPr indent="0" marL="0">
-              <a:lnSpc>
-                <a:spcPct val="130000"/>
-              </a:lnSpc>
-              <a:spcAft>
-                <a:spcPts val="1400"/>
-              </a:spcAft>
-              <a:buNone/>
-            </a:pPr>
-            <a:r>
-              <a:rPr lang="en-US" sz="1800" dirty="0">
-                <a:solidFill>
-                  <a:srgbClr val="1A1A1A"/>
-                </a:solidFill>
-                <a:latin typeface="Calibri" pitchFamily="34" charset="0"/>
-                <a:ea typeface="Calibri" pitchFamily="34" charset="-122"/>
-                <a:cs typeface="Calibri" pitchFamily="34" charset="-120"/>
-              </a:rPr>
-              <a:t>In a market economic system, prices — driven by supply and demand — coordinate everything, with no central planner.</a:t>
-            </a:r>
-            <a:endParaRPr lang="en-US" sz="1800" dirty="0"/>
-          </a:p>
-          <a:p>
-            <a:pPr indent="0" marL="0">
-              <a:lnSpc>
-                <a:spcPct val="130000"/>
-              </a:lnSpc>
-              <a:spcAft>
-                <a:spcPts val="1400"/>
-              </a:spcAft>
-              <a:buNone/>
-            </a:pPr>
-            <a:r>
-              <a:rPr lang="en-US" sz="1800" dirty="0">
-                <a:solidFill>
-                  <a:srgbClr val="1A1A1A"/>
-                </a:solidFill>
-                <a:latin typeface="Calibri" pitchFamily="34" charset="0"/>
-                <a:ea typeface="Calibri" pitchFamily="34" charset="-122"/>
-                <a:cs typeface="Calibri" pitchFamily="34" charset="-120"/>
-              </a:rPr>
-              <a:t>More people want grips than Tom is making → price gets bid up → that signals "make more, there's profit in it."</a:t>
-            </a:r>
-            <a:endParaRPr lang="en-US" sz="1800" dirty="0"/>
-          </a:p>
-          <a:p>
-            <a:pPr indent="0" marL="0">
-              <a:lnSpc>
-                <a:spcPct val="130000"/>
-              </a:lnSpc>
-              <a:spcAft>
-                <a:spcPts val="1400"/>
-              </a:spcAft>
-              <a:buNone/>
-            </a:pPr>
-            <a:r>
-              <a:rPr lang="en-US" sz="1800" dirty="0">
-                <a:solidFill>
-                  <a:srgbClr val="1A1A1A"/>
-                </a:solidFill>
-                <a:latin typeface="Calibri" pitchFamily="34" charset="0"/>
-                <a:ea typeface="Calibri" pitchFamily="34" charset="-122"/>
-                <a:cs typeface="Calibri" pitchFamily="34" charset="-120"/>
-              </a:rPr>
-              <a:t>Millions of these tiny signals, constantly, are sometimes called the "invisible hand."</a:t>
+              <a:t>PED = −40 ÷ 25 = −1.6 → Elastic</a:t>
             </a:r>
             <a:endParaRPr lang="en-US" sz="1800" dirty="0"/>
           </a:p>
@@ -4085,57 +5821,120 @@
       </p:grpSpPr>
       <p:sp>
         <p:nvSpPr>
-          <p:cNvPr id="2" name="Text 0"/>
-          <p:cNvSpPr/>
-          <p:nvPr/>
-        </p:nvSpPr>
-        <p:spPr>
-          <a:xfrm>
-            <a:off x="640080" y="548640"/>
-            <a:ext cx="10881360" cy="731520"/>
-          </a:xfrm>
-          <a:prstGeom prst="rect">
-            <a:avLst/>
-          </a:prstGeom>
-          <a:noFill/>
-          <a:ln/>
-        </p:spPr>
-        <p:txBody>
-          <a:bodyPr wrap="square" rtlCol="0" anchor="ctr"/>
-          <a:lstStyle/>
-          <a:p>
-            <a:pPr indent="0" marL="0">
-              <a:buNone/>
-            </a:pPr>
-            <a:r>
-              <a:rPr lang="en-US" sz="3000" b="1" dirty="0">
-                <a:solidFill>
-                  <a:srgbClr val="1E2761"/>
-                </a:solidFill>
-                <a:latin typeface="Cambria" pitchFamily="34" charset="0"/>
-                <a:ea typeface="Cambria" pitchFamily="34" charset="-122"/>
-                <a:cs typeface="Cambria" pitchFamily="34" charset="-120"/>
-              </a:rPr>
-              <a:t>Three questions every economy answers</a:t>
-            </a:r>
-            <a:endParaRPr lang="en-US" sz="3000" dirty="0"/>
-          </a:p>
-        </p:txBody>
-      </p:sp>
-      <p:sp>
-        <p:nvSpPr>
-          <p:cNvPr id="3" name="Shape 1"/>
-          <p:cNvSpPr/>
-          <p:nvPr/>
-        </p:nvSpPr>
-        <p:spPr>
-          <a:xfrm>
-            <a:off x="790956" y="1828800"/>
-            <a:ext cx="3291840" cy="3108960"/>
+          <p:cNvPr id="2" name="Shape 0"/>
+          <p:cNvSpPr/>
+          <p:nvPr/>
+        </p:nvSpPr>
+        <p:spPr>
+          <a:xfrm>
+            <a:off x="640080" y="502920"/>
+            <a:ext cx="1527048" cy="365760"/>
           </a:xfrm>
           <a:prstGeom prst="roundRect">
             <a:avLst>
-              <a:gd name="adj" fmla="val 3529"/>
+              <a:gd name="adj" fmla="val 50000"/>
+            </a:avLst>
+          </a:prstGeom>
+          <a:solidFill>
+            <a:srgbClr val="F96167">
+              <a:alpha val="18000"/>
+            </a:srgbClr>
+          </a:solidFill>
+          <a:ln/>
+        </p:spPr>
+      </p:sp>
+      <p:sp>
+        <p:nvSpPr>
+          <p:cNvPr id="3" name="Text 1"/>
+          <p:cNvSpPr/>
+          <p:nvPr/>
+        </p:nvSpPr>
+        <p:spPr>
+          <a:xfrm>
+            <a:off x="640080" y="502920"/>
+            <a:ext cx="1527048" cy="365760"/>
+          </a:xfrm>
+          <a:prstGeom prst="rect">
+            <a:avLst/>
+          </a:prstGeom>
+          <a:noFill/>
+          <a:ln/>
+        </p:spPr>
+        <p:txBody>
+          <a:bodyPr wrap="square" rtlCol="0" anchor="ctr"/>
+          <a:lstStyle/>
+          <a:p>
+            <a:pPr algn="ctr" indent="0" marL="0">
+              <a:buNone/>
+            </a:pPr>
+            <a:r>
+              <a:rPr lang="en-US" sz="1200" b="1" dirty="0">
+                <a:solidFill>
+                  <a:srgbClr val="F96167"/>
+                </a:solidFill>
+                <a:latin typeface="Calibri" pitchFamily="34" charset="0"/>
+                <a:ea typeface="Calibri" pitchFamily="34" charset="-122"/>
+                <a:cs typeface="Calibri" pitchFamily="34" charset="-120"/>
+              </a:rPr>
+              <a:t>✍️ Your turn</a:t>
+            </a:r>
+            <a:endParaRPr lang="en-US" sz="1200" dirty="0"/>
+          </a:p>
+        </p:txBody>
+      </p:sp>
+      <p:sp>
+        <p:nvSpPr>
+          <p:cNvPr id="4" name="Text 2"/>
+          <p:cNvSpPr/>
+          <p:nvPr/>
+        </p:nvSpPr>
+        <p:spPr>
+          <a:xfrm>
+            <a:off x="640080" y="1051560"/>
+            <a:ext cx="10881360" cy="548640"/>
+          </a:xfrm>
+          <a:prstGeom prst="rect">
+            <a:avLst/>
+          </a:prstGeom>
+          <a:noFill/>
+          <a:ln/>
+        </p:spPr>
+        <p:txBody>
+          <a:bodyPr wrap="square" rtlCol="0" anchor="ctr"/>
+          <a:lstStyle/>
+          <a:p>
+            <a:pPr indent="0" marL="0">
+              <a:buNone/>
+            </a:pPr>
+            <a:r>
+              <a:rPr lang="en-US" sz="2200" b="1" dirty="0">
+                <a:solidFill>
+                  <a:srgbClr val="1E2761"/>
+                </a:solidFill>
+                <a:latin typeface="Calibri" pitchFamily="34" charset="0"/>
+                <a:ea typeface="Calibri" pitchFamily="34" charset="-122"/>
+                <a:cs typeface="Calibri" pitchFamily="34" charset="-120"/>
+              </a:rPr>
+              <a:t>📱 Warm-up: Tom's Print Co phone stands</a:t>
+            </a:r>
+            <a:endParaRPr lang="en-US" sz="2200" dirty="0"/>
+          </a:p>
+        </p:txBody>
+      </p:sp>
+      <p:sp>
+        <p:nvSpPr>
+          <p:cNvPr id="5" name="Shape 3"/>
+          <p:cNvSpPr/>
+          <p:nvPr/>
+        </p:nvSpPr>
+        <p:spPr>
+          <a:xfrm>
+            <a:off x="3566160" y="1920240"/>
+            <a:ext cx="5029200" cy="3108960"/>
+          </a:xfrm>
+          <a:prstGeom prst="roundRect">
+            <a:avLst>
+              <a:gd name="adj" fmla="val 4118"/>
             </a:avLst>
           </a:prstGeom>
           <a:solidFill>
@@ -4146,14 +5945,14 @@
       </p:sp>
       <p:sp>
         <p:nvSpPr>
-          <p:cNvPr id="4" name="Text 2"/>
-          <p:cNvSpPr/>
-          <p:nvPr/>
-        </p:nvSpPr>
-        <p:spPr>
-          <a:xfrm>
-            <a:off x="1065276" y="2103120"/>
-            <a:ext cx="2743200" cy="548640"/>
+          <p:cNvPr id="6" name="Text 4"/>
+          <p:cNvSpPr/>
+          <p:nvPr/>
+        </p:nvSpPr>
+        <p:spPr>
+          <a:xfrm>
+            <a:off x="3840480" y="2194560"/>
+            <a:ext cx="4480560" cy="365760"/>
           </a:xfrm>
           <a:prstGeom prst="rect">
             <a:avLst/>
@@ -4169,30 +5968,30 @@
               <a:buNone/>
             </a:pPr>
             <a:r>
-              <a:rPr lang="en-US" sz="1600" b="1" dirty="0">
-                <a:solidFill>
-                  <a:srgbClr val="1E2761"/>
-                </a:solidFill>
-                <a:latin typeface="Calibri" pitchFamily="34" charset="0"/>
-                <a:ea typeface="Calibri" pitchFamily="34" charset="-122"/>
-                <a:cs typeface="Calibri" pitchFamily="34" charset="-120"/>
-              </a:rPr>
-              <a:t>What to produce?</a:t>
-            </a:r>
-            <a:endParaRPr lang="en-US" sz="1600" dirty="0"/>
-          </a:p>
-        </p:txBody>
-      </p:sp>
-      <p:sp>
-        <p:nvSpPr>
-          <p:cNvPr id="5" name="Text 3"/>
-          <p:cNvSpPr/>
-          <p:nvPr/>
-        </p:nvSpPr>
-        <p:spPr>
-          <a:xfrm>
-            <a:off x="1065276" y="2697480"/>
-            <a:ext cx="2743200" cy="2011680"/>
+              <a:rPr lang="en-US" sz="1400" b="1" dirty="0">
+                <a:solidFill>
+                  <a:srgbClr val="5B5B5B"/>
+                </a:solidFill>
+                <a:latin typeface="Calibri" pitchFamily="34" charset="0"/>
+                <a:ea typeface="Calibri" pitchFamily="34" charset="-122"/>
+                <a:cs typeface="Calibri" pitchFamily="34" charset="-120"/>
+              </a:rPr>
+              <a:t>Your turn — PED + TR practice (a price CUT)</a:t>
+            </a:r>
+            <a:endParaRPr lang="en-US" sz="1400" dirty="0"/>
+          </a:p>
+        </p:txBody>
+      </p:sp>
+      <p:sp>
+        <p:nvSpPr>
+          <p:cNvPr id="7" name="Text 5"/>
+          <p:cNvSpPr/>
+          <p:nvPr/>
+        </p:nvSpPr>
+        <p:spPr>
+          <a:xfrm>
+            <a:off x="3840480" y="2651760"/>
+            <a:ext cx="4480560" cy="1280160"/>
           </a:xfrm>
           <a:prstGeom prst="rect">
             <a:avLst/>
@@ -4205,13 +6004,13 @@
           <a:lstStyle/>
           <a:p>
             <a:pPr indent="0" marL="0">
-              <a:lnSpc>
-                <a:spcPct val="125000"/>
-              </a:lnSpc>
-              <a:buNone/>
-            </a:pPr>
-            <a:r>
-              <a:rPr lang="en-US" sz="1250" dirty="0">
+              <a:spcAft>
+                <a:spcPts val="800"/>
+              </a:spcAft>
+              <a:buNone/>
+            </a:pPr>
+            <a:r>
+              <a:rPr lang="en-US" sz="1500" dirty="0">
                 <a:solidFill>
                   <a:srgbClr val="1A1A1A"/>
                 </a:solidFill>
@@ -4219,44 +6018,65 @@
                 <a:ea typeface="Calibri" pitchFamily="34" charset="-122"/>
                 <a:cs typeface="Calibri" pitchFamily="34" charset="-120"/>
               </a:rPr>
-              <a:t>Whatever earns a profit — signalled by what consumers are willing to pay for.</a:t>
-            </a:r>
-            <a:endParaRPr lang="en-US" sz="1250" dirty="0"/>
-          </a:p>
-        </p:txBody>
-      </p:sp>
-      <p:sp>
-        <p:nvSpPr>
-          <p:cNvPr id="6" name="Shape 4"/>
-          <p:cNvSpPr/>
-          <p:nvPr/>
-        </p:nvSpPr>
-        <p:spPr>
-          <a:xfrm>
-            <a:off x="4448556" y="1828800"/>
-            <a:ext cx="3291840" cy="3108960"/>
-          </a:xfrm>
-          <a:prstGeom prst="roundRect">
-            <a:avLst>
-              <a:gd name="adj" fmla="val 3529"/>
-            </a:avLst>
-          </a:prstGeom>
-          <a:solidFill>
-            <a:srgbClr val="F4F5F7"/>
-          </a:solidFill>
-          <a:ln/>
-        </p:spPr>
-      </p:sp>
-      <p:sp>
-        <p:nvSpPr>
-          <p:cNvPr id="7" name="Text 5"/>
-          <p:cNvSpPr/>
-          <p:nvPr/>
-        </p:nvSpPr>
-        <p:spPr>
-          <a:xfrm>
-            <a:off x="4722876" y="2103120"/>
-            <a:ext cx="2743200" cy="548640"/>
+              <a:t>Price: $10 → $8  (−20%)</a:t>
+            </a:r>
+            <a:endParaRPr lang="en-US" sz="1500" dirty="0"/>
+          </a:p>
+          <a:p>
+            <a:pPr indent="0" marL="0">
+              <a:spcAft>
+                <a:spcPts val="800"/>
+              </a:spcAft>
+              <a:buNone/>
+            </a:pPr>
+            <a:r>
+              <a:rPr lang="en-US" sz="1500" dirty="0">
+                <a:solidFill>
+                  <a:srgbClr val="1A1A1A"/>
+                </a:solidFill>
+                <a:latin typeface="Calibri" pitchFamily="34" charset="0"/>
+                <a:ea typeface="Calibri" pitchFamily="34" charset="-122"/>
+                <a:cs typeface="Calibri" pitchFamily="34" charset="-120"/>
+              </a:rPr>
+              <a:t>Quantity: 45 → 63 per week  (+40%)</a:t>
+            </a:r>
+            <a:endParaRPr lang="en-US" sz="1500" dirty="0"/>
+          </a:p>
+        </p:txBody>
+      </p:sp>
+      <p:sp>
+        <p:nvSpPr>
+          <p:cNvPr id="8" name="Shape 6"/>
+          <p:cNvSpPr/>
+          <p:nvPr/>
+        </p:nvSpPr>
+        <p:spPr>
+          <a:xfrm>
+            <a:off x="3840480" y="4343400"/>
+            <a:ext cx="1828800" cy="0"/>
+          </a:xfrm>
+          <a:prstGeom prst="line">
+            <a:avLst/>
+          </a:prstGeom>
+          <a:noFill/>
+          <a:ln w="19050">
+            <a:solidFill>
+              <a:srgbClr val="5B5B5B"/>
+            </a:solidFill>
+            <a:prstDash val="solid"/>
+          </a:ln>
+        </p:spPr>
+      </p:sp>
+      <p:sp>
+        <p:nvSpPr>
+          <p:cNvPr id="9" name="Text 7"/>
+          <p:cNvSpPr/>
+          <p:nvPr/>
+        </p:nvSpPr>
+        <p:spPr>
+          <a:xfrm>
+            <a:off x="3840480" y="3977640"/>
+            <a:ext cx="4206240" cy="320040"/>
           </a:xfrm>
           <a:prstGeom prst="rect">
             <a:avLst/>
@@ -4272,49 +6092,7 @@
               <a:buNone/>
             </a:pPr>
             <a:r>
-              <a:rPr lang="en-US" sz="1600" b="1" dirty="0">
-                <a:solidFill>
-                  <a:srgbClr val="1E2761"/>
-                </a:solidFill>
-                <a:latin typeface="Calibri" pitchFamily="34" charset="0"/>
-                <a:ea typeface="Calibri" pitchFamily="34" charset="-122"/>
-                <a:cs typeface="Calibri" pitchFamily="34" charset="-120"/>
-              </a:rPr>
-              <a:t>How to produce?</a:t>
-            </a:r>
-            <a:endParaRPr lang="en-US" sz="1600" dirty="0"/>
-          </a:p>
-        </p:txBody>
-      </p:sp>
-      <p:sp>
-        <p:nvSpPr>
-          <p:cNvPr id="8" name="Text 6"/>
-          <p:cNvSpPr/>
-          <p:nvPr/>
-        </p:nvSpPr>
-        <p:spPr>
-          <a:xfrm>
-            <a:off x="4722876" y="2697480"/>
-            <a:ext cx="2743200" cy="2011680"/>
-          </a:xfrm>
-          <a:prstGeom prst="rect">
-            <a:avLst/>
-          </a:prstGeom>
-          <a:noFill/>
-          <a:ln/>
-        </p:spPr>
-        <p:txBody>
-          <a:bodyPr wrap="square" rtlCol="0" anchor="t"/>
-          <a:lstStyle/>
-          <a:p>
-            <a:pPr indent="0" marL="0">
-              <a:lnSpc>
-                <a:spcPct val="125000"/>
-              </a:lnSpc>
-              <a:buNone/>
-            </a:pPr>
-            <a:r>
-              <a:rPr lang="en-US" sz="1250" dirty="0">
+              <a:rPr lang="en-US" sz="1400" dirty="0">
                 <a:solidFill>
                   <a:srgbClr val="1A1A1A"/>
                 </a:solidFill>
@@ -4322,44 +6100,45 @@
                 <a:ea typeface="Calibri" pitchFamily="34" charset="-122"/>
                 <a:cs typeface="Calibri" pitchFamily="34" charset="-120"/>
               </a:rPr>
-              <a:t>However keeps costs lowest — competition punishes wasteful producers with lower profit.</a:t>
-            </a:r>
-            <a:endParaRPr lang="en-US" sz="1250" dirty="0"/>
-          </a:p>
-        </p:txBody>
-      </p:sp>
-      <p:sp>
-        <p:nvSpPr>
-          <p:cNvPr id="9" name="Shape 7"/>
-          <p:cNvSpPr/>
-          <p:nvPr/>
-        </p:nvSpPr>
-        <p:spPr>
-          <a:xfrm>
-            <a:off x="8106156" y="1828800"/>
-            <a:ext cx="3291840" cy="3108960"/>
-          </a:xfrm>
-          <a:prstGeom prst="roundRect">
-            <a:avLst>
-              <a:gd name="adj" fmla="val 3529"/>
-            </a:avLst>
-          </a:prstGeom>
-          <a:solidFill>
-            <a:srgbClr val="F4F5F7"/>
-          </a:solidFill>
-          <a:ln/>
-        </p:spPr>
-      </p:sp>
-      <p:sp>
-        <p:nvSpPr>
-          <p:cNvPr id="10" name="Text 8"/>
-          <p:cNvSpPr/>
-          <p:nvPr/>
-        </p:nvSpPr>
-        <p:spPr>
-          <a:xfrm>
-            <a:off x="8380476" y="2103120"/>
-            <a:ext cx="2743200" cy="548640"/>
+              <a:t>TR before = $____</a:t>
+            </a:r>
+            <a:endParaRPr lang="en-US" sz="1400" dirty="0"/>
+          </a:p>
+        </p:txBody>
+      </p:sp>
+      <p:sp>
+        <p:nvSpPr>
+          <p:cNvPr id="10" name="Shape 8"/>
+          <p:cNvSpPr/>
+          <p:nvPr/>
+        </p:nvSpPr>
+        <p:spPr>
+          <a:xfrm>
+            <a:off x="3840480" y="4709160"/>
+            <a:ext cx="1828800" cy="0"/>
+          </a:xfrm>
+          <a:prstGeom prst="line">
+            <a:avLst/>
+          </a:prstGeom>
+          <a:noFill/>
+          <a:ln w="19050">
+            <a:solidFill>
+              <a:srgbClr val="5B5B5B"/>
+            </a:solidFill>
+            <a:prstDash val="solid"/>
+          </a:ln>
+        </p:spPr>
+      </p:sp>
+      <p:sp>
+        <p:nvSpPr>
+          <p:cNvPr id="11" name="Text 9"/>
+          <p:cNvSpPr/>
+          <p:nvPr/>
+        </p:nvSpPr>
+        <p:spPr>
+          <a:xfrm>
+            <a:off x="3840480" y="4343400"/>
+            <a:ext cx="4206240" cy="320040"/>
           </a:xfrm>
           <a:prstGeom prst="rect">
             <a:avLst/>
@@ -4375,49 +6154,7 @@
               <a:buNone/>
             </a:pPr>
             <a:r>
-              <a:rPr lang="en-US" sz="1600" b="1" dirty="0">
-                <a:solidFill>
-                  <a:srgbClr val="1E2761"/>
-                </a:solidFill>
-                <a:latin typeface="Calibri" pitchFamily="34" charset="0"/>
-                <a:ea typeface="Calibri" pitchFamily="34" charset="-122"/>
-                <a:cs typeface="Calibri" pitchFamily="34" charset="-120"/>
-              </a:rPr>
-              <a:t>For whom?</a:t>
-            </a:r>
-            <a:endParaRPr lang="en-US" sz="1600" dirty="0"/>
-          </a:p>
-        </p:txBody>
-      </p:sp>
-      <p:sp>
-        <p:nvSpPr>
-          <p:cNvPr id="11" name="Text 9"/>
-          <p:cNvSpPr/>
-          <p:nvPr/>
-        </p:nvSpPr>
-        <p:spPr>
-          <a:xfrm>
-            <a:off x="8380476" y="2697480"/>
-            <a:ext cx="2743200" cy="2011680"/>
-          </a:xfrm>
-          <a:prstGeom prst="rect">
-            <a:avLst/>
-          </a:prstGeom>
-          <a:noFill/>
-          <a:ln/>
-        </p:spPr>
-        <p:txBody>
-          <a:bodyPr wrap="square" rtlCol="0" anchor="t"/>
-          <a:lstStyle/>
-          <a:p>
-            <a:pPr indent="0" marL="0">
-              <a:lnSpc>
-                <a:spcPct val="125000"/>
-              </a:lnSpc>
-              <a:buNone/>
-            </a:pPr>
-            <a:r>
-              <a:rPr lang="en-US" sz="1250" dirty="0">
+              <a:rPr lang="en-US" sz="1400" dirty="0">
                 <a:solidFill>
                   <a:srgbClr val="1A1A1A"/>
                 </a:solidFill>
@@ -4425,9 +6162,9 @@
                 <a:ea typeface="Calibri" pitchFamily="34" charset="-122"/>
                 <a:cs typeface="Calibri" pitchFamily="34" charset="-120"/>
               </a:rPr>
-              <a:t>Whoever is willing AND able to pay the market price — not need, lottery, or the state.</a:t>
-            </a:r>
-            <a:endParaRPr lang="en-US" sz="1250" dirty="0"/>
+              <a:t>TR after = $____</a:t>
+            </a:r>
+            <a:endParaRPr lang="en-US" sz="1400" dirty="0"/>
           </a:p>
         </p:txBody>
       </p:sp>
@@ -4465,14 +6202,38 @@
       </p:grpSpPr>
       <p:sp>
         <p:nvSpPr>
-          <p:cNvPr id="2" name="Text 0"/>
-          <p:cNvSpPr/>
-          <p:nvPr/>
-        </p:nvSpPr>
-        <p:spPr>
-          <a:xfrm>
-            <a:off x="640080" y="548640"/>
-            <a:ext cx="10881360" cy="731520"/>
+          <p:cNvPr id="2" name="Shape 0"/>
+          <p:cNvSpPr/>
+          <p:nvPr/>
+        </p:nvSpPr>
+        <p:spPr>
+          <a:xfrm>
+            <a:off x="640080" y="502920"/>
+            <a:ext cx="1325880" cy="365760"/>
+          </a:xfrm>
+          <a:prstGeom prst="roundRect">
+            <a:avLst>
+              <a:gd name="adj" fmla="val 50000"/>
+            </a:avLst>
+          </a:prstGeom>
+          <a:solidFill>
+            <a:srgbClr val="1BAF7A">
+              <a:alpha val="18000"/>
+            </a:srgbClr>
+          </a:solidFill>
+          <a:ln/>
+        </p:spPr>
+      </p:sp>
+      <p:sp>
+        <p:nvSpPr>
+          <p:cNvPr id="3" name="Text 1"/>
+          <p:cNvSpPr/>
+          <p:nvPr/>
+        </p:nvSpPr>
+        <p:spPr>
+          <a:xfrm>
+            <a:off x="640080" y="502920"/>
+            <a:ext cx="1325880" cy="365760"/>
           </a:xfrm>
           <a:prstGeom prst="rect">
             <a:avLst/>
@@ -4484,330 +6245,242 @@
           <a:bodyPr wrap="square" rtlCol="0" anchor="ctr"/>
           <a:lstStyle/>
           <a:p>
-            <a:pPr indent="0" marL="0">
-              <a:buNone/>
-            </a:pPr>
-            <a:r>
-              <a:rPr lang="en-US" sz="3000" b="1" dirty="0">
+            <a:pPr algn="ctr" indent="0" marL="0">
+              <a:buNone/>
+            </a:pPr>
+            <a:r>
+              <a:rPr lang="en-US" sz="1200" b="1" dirty="0">
+                <a:solidFill>
+                  <a:srgbClr val="1BAF7A"/>
+                </a:solidFill>
+                <a:latin typeface="Calibri" pitchFamily="34" charset="0"/>
+                <a:ea typeface="Calibri" pitchFamily="34" charset="-122"/>
+                <a:cs typeface="Calibri" pitchFamily="34" charset="-120"/>
+              </a:rPr>
+              <a:t>✅ Revealed</a:t>
+            </a:r>
+            <a:endParaRPr lang="en-US" sz="1200" dirty="0"/>
+          </a:p>
+        </p:txBody>
+      </p:sp>
+      <p:sp>
+        <p:nvSpPr>
+          <p:cNvPr id="4" name="Text 2"/>
+          <p:cNvSpPr/>
+          <p:nvPr/>
+        </p:nvSpPr>
+        <p:spPr>
+          <a:xfrm>
+            <a:off x="640080" y="1051560"/>
+            <a:ext cx="10881360" cy="548640"/>
+          </a:xfrm>
+          <a:prstGeom prst="rect">
+            <a:avLst/>
+          </a:prstGeom>
+          <a:noFill/>
+          <a:ln/>
+        </p:spPr>
+        <p:txBody>
+          <a:bodyPr wrap="square" rtlCol="0" anchor="ctr"/>
+          <a:lstStyle/>
+          <a:p>
+            <a:pPr indent="0" marL="0">
+              <a:buNone/>
+            </a:pPr>
+            <a:r>
+              <a:rPr lang="en-US" sz="2200" b="1" dirty="0">
                 <a:solidFill>
                   <a:srgbClr val="1E2761"/>
+                </a:solidFill>
+                <a:latin typeface="Calibri" pitchFamily="34" charset="0"/>
+                <a:ea typeface="Calibri" pitchFamily="34" charset="-122"/>
+                <a:cs typeface="Calibri" pitchFamily="34" charset="-120"/>
+              </a:rPr>
+              <a:t>📱 Phone stands — answer</a:t>
+            </a:r>
+            <a:endParaRPr lang="en-US" sz="2200" dirty="0"/>
+          </a:p>
+        </p:txBody>
+      </p:sp>
+      <p:sp>
+        <p:nvSpPr>
+          <p:cNvPr id="5" name="Shape 3"/>
+          <p:cNvSpPr/>
+          <p:nvPr/>
+        </p:nvSpPr>
+        <p:spPr>
+          <a:xfrm>
+            <a:off x="3566160" y="1920240"/>
+            <a:ext cx="5029200" cy="3108960"/>
+          </a:xfrm>
+          <a:prstGeom prst="roundRect">
+            <a:avLst>
+              <a:gd name="adj" fmla="val 4118"/>
+            </a:avLst>
+          </a:prstGeom>
+          <a:solidFill>
+            <a:srgbClr val="F4F5F7"/>
+          </a:solidFill>
+          <a:ln/>
+        </p:spPr>
+      </p:sp>
+      <p:sp>
+        <p:nvSpPr>
+          <p:cNvPr id="6" name="Text 4"/>
+          <p:cNvSpPr/>
+          <p:nvPr/>
+        </p:nvSpPr>
+        <p:spPr>
+          <a:xfrm>
+            <a:off x="3840480" y="2194560"/>
+            <a:ext cx="4480560" cy="365760"/>
+          </a:xfrm>
+          <a:prstGeom prst="rect">
+            <a:avLst/>
+          </a:prstGeom>
+          <a:noFill/>
+          <a:ln/>
+        </p:spPr>
+        <p:txBody>
+          <a:bodyPr wrap="square" rtlCol="0" anchor="ctr"/>
+          <a:lstStyle/>
+          <a:p>
+            <a:pPr indent="0" marL="0">
+              <a:buNone/>
+            </a:pPr>
+            <a:r>
+              <a:rPr lang="en-US" sz="1400" b="1" dirty="0">
+                <a:solidFill>
+                  <a:srgbClr val="5B5B5B"/>
+                </a:solidFill>
+                <a:latin typeface="Calibri" pitchFamily="34" charset="0"/>
+                <a:ea typeface="Calibri" pitchFamily="34" charset="-122"/>
+                <a:cs typeface="Calibri" pitchFamily="34" charset="-120"/>
+              </a:rPr>
+              <a:t>Check your answer</a:t>
+            </a:r>
+            <a:endParaRPr lang="en-US" sz="1400" dirty="0"/>
+          </a:p>
+        </p:txBody>
+      </p:sp>
+      <p:sp>
+        <p:nvSpPr>
+          <p:cNvPr id="7" name="Text 5"/>
+          <p:cNvSpPr/>
+          <p:nvPr/>
+        </p:nvSpPr>
+        <p:spPr>
+          <a:xfrm>
+            <a:off x="3840480" y="2651760"/>
+            <a:ext cx="4480560" cy="1463040"/>
+          </a:xfrm>
+          <a:prstGeom prst="rect">
+            <a:avLst/>
+          </a:prstGeom>
+          <a:noFill/>
+          <a:ln/>
+        </p:spPr>
+        <p:txBody>
+          <a:bodyPr wrap="square" rtlCol="0" anchor="t"/>
+          <a:lstStyle/>
+          <a:p>
+            <a:pPr indent="0" marL="0">
+              <a:spcAft>
+                <a:spcPts val="600"/>
+              </a:spcAft>
+              <a:buNone/>
+            </a:pPr>
+            <a:r>
+              <a:rPr lang="en-US" sz="1500" dirty="0">
+                <a:solidFill>
+                  <a:srgbClr val="1A1A1A"/>
+                </a:solidFill>
+                <a:latin typeface="Calibri" pitchFamily="34" charset="0"/>
+                <a:ea typeface="Calibri" pitchFamily="34" charset="-122"/>
+                <a:cs typeface="Calibri" pitchFamily="34" charset="-120"/>
+              </a:rPr>
+              <a:t>PED = 40 ÷ −20 = −2 (elastic)</a:t>
+            </a:r>
+            <a:endParaRPr lang="en-US" sz="1500" dirty="0"/>
+          </a:p>
+          <a:p>
+            <a:pPr indent="0" marL="0">
+              <a:spcAft>
+                <a:spcPts val="600"/>
+              </a:spcAft>
+              <a:buNone/>
+            </a:pPr>
+            <a:r>
+              <a:rPr lang="en-US" sz="1500" dirty="0">
+                <a:solidFill>
+                  <a:srgbClr val="1A1A1A"/>
+                </a:solidFill>
+                <a:latin typeface="Calibri" pitchFamily="34" charset="0"/>
+                <a:ea typeface="Calibri" pitchFamily="34" charset="-122"/>
+                <a:cs typeface="Calibri" pitchFamily="34" charset="-120"/>
+              </a:rPr>
+              <a:t>TR before = $10 × 45 = $450</a:t>
+            </a:r>
+            <a:endParaRPr lang="en-US" sz="1500" dirty="0"/>
+          </a:p>
+          <a:p>
+            <a:pPr indent="0" marL="0">
+              <a:spcAft>
+                <a:spcPts val="600"/>
+              </a:spcAft>
+              <a:buNone/>
+            </a:pPr>
+            <a:r>
+              <a:rPr lang="en-US" sz="1500" dirty="0">
+                <a:solidFill>
+                  <a:srgbClr val="1A1A1A"/>
+                </a:solidFill>
+                <a:latin typeface="Calibri" pitchFamily="34" charset="0"/>
+                <a:ea typeface="Calibri" pitchFamily="34" charset="-122"/>
+                <a:cs typeface="Calibri" pitchFamily="34" charset="-120"/>
+              </a:rPr>
+              <a:t>TR after = $8 × 63 = $504</a:t>
+            </a:r>
+            <a:endParaRPr lang="en-US" sz="1500" dirty="0"/>
+          </a:p>
+        </p:txBody>
+      </p:sp>
+      <p:sp>
+        <p:nvSpPr>
+          <p:cNvPr id="8" name="Text 6"/>
+          <p:cNvSpPr/>
+          <p:nvPr/>
+        </p:nvSpPr>
+        <p:spPr>
+          <a:xfrm>
+            <a:off x="3840480" y="4206240"/>
+            <a:ext cx="4480560" cy="731520"/>
+          </a:xfrm>
+          <a:prstGeom prst="rect">
+            <a:avLst/>
+          </a:prstGeom>
+          <a:noFill/>
+          <a:ln/>
+        </p:spPr>
+        <p:txBody>
+          <a:bodyPr wrap="square" rtlCol="0" anchor="ctr"/>
+          <a:lstStyle/>
+          <a:p>
+            <a:pPr indent="0" marL="0">
+              <a:buNone/>
+            </a:pPr>
+            <a:r>
+              <a:rPr lang="en-US" sz="1800" b="1" dirty="0">
+                <a:solidFill>
+                  <a:srgbClr val="1BAF7A"/>
                 </a:solidFill>
                 <a:latin typeface="Cambria" pitchFamily="34" charset="0"/>
                 <a:ea typeface="Cambria" pitchFamily="34" charset="-122"/>
                 <a:cs typeface="Cambria" pitchFamily="34" charset="-120"/>
               </a:rPr>
-              <a:t>Characteristics of a market economy (1/2)</a:t>
-            </a:r>
-            <a:endParaRPr lang="en-US" sz="3000" dirty="0"/>
-          </a:p>
-        </p:txBody>
-      </p:sp>
-      <p:sp>
-        <p:nvSpPr>
-          <p:cNvPr id="3" name="Shape 1"/>
-          <p:cNvSpPr/>
-          <p:nvPr/>
-        </p:nvSpPr>
-        <p:spPr>
-          <a:xfrm>
-            <a:off x="790956" y="1828800"/>
-            <a:ext cx="3291840" cy="3108960"/>
-          </a:xfrm>
-          <a:prstGeom prst="roundRect">
-            <a:avLst>
-              <a:gd name="adj" fmla="val 3529"/>
-            </a:avLst>
-          </a:prstGeom>
-          <a:solidFill>
-            <a:srgbClr val="F4F5F7"/>
-          </a:solidFill>
-          <a:ln/>
-        </p:spPr>
-      </p:sp>
-      <p:sp>
-        <p:nvSpPr>
-          <p:cNvPr id="4" name="Text 2"/>
-          <p:cNvSpPr/>
-          <p:nvPr/>
-        </p:nvSpPr>
-        <p:spPr>
-          <a:xfrm>
-            <a:off x="1065276" y="2103120"/>
-            <a:ext cx="2743200" cy="548640"/>
-          </a:xfrm>
-          <a:prstGeom prst="rect">
-            <a:avLst/>
-          </a:prstGeom>
-          <a:noFill/>
-          <a:ln/>
-        </p:spPr>
-        <p:txBody>
-          <a:bodyPr wrap="square" rtlCol="0" anchor="ctr"/>
-          <a:lstStyle/>
-          <a:p>
-            <a:pPr indent="0" marL="0">
-              <a:buNone/>
-            </a:pPr>
-            <a:r>
-              <a:rPr lang="en-US" sz="1600" b="1" dirty="0">
-                <a:solidFill>
-                  <a:srgbClr val="1E2761"/>
-                </a:solidFill>
-                <a:latin typeface="Calibri" pitchFamily="34" charset="0"/>
-                <a:ea typeface="Calibri" pitchFamily="34" charset="-122"/>
-                <a:cs typeface="Calibri" pitchFamily="34" charset="-120"/>
-              </a:rPr>
-              <a:t>Private ownership</a:t>
-            </a:r>
-            <a:endParaRPr lang="en-US" sz="1600" dirty="0"/>
-          </a:p>
-        </p:txBody>
-      </p:sp>
-      <p:sp>
-        <p:nvSpPr>
-          <p:cNvPr id="5" name="Text 3"/>
-          <p:cNvSpPr/>
-          <p:nvPr/>
-        </p:nvSpPr>
-        <p:spPr>
-          <a:xfrm>
-            <a:off x="1065276" y="2697480"/>
-            <a:ext cx="2743200" cy="2011680"/>
-          </a:xfrm>
-          <a:prstGeom prst="rect">
-            <a:avLst/>
-          </a:prstGeom>
-          <a:noFill/>
-          <a:ln/>
-        </p:spPr>
-        <p:txBody>
-          <a:bodyPr wrap="square" rtlCol="0" anchor="t"/>
-          <a:lstStyle/>
-          <a:p>
-            <a:pPr indent="0" marL="0">
-              <a:lnSpc>
-                <a:spcPct val="125000"/>
-              </a:lnSpc>
-              <a:buNone/>
-            </a:pPr>
-            <a:r>
-              <a:rPr lang="en-US" sz="1250" dirty="0">
-                <a:solidFill>
-                  <a:srgbClr val="1A1A1A"/>
-                </a:solidFill>
-                <a:latin typeface="Calibri" pitchFamily="34" charset="0"/>
-                <a:ea typeface="Calibri" pitchFamily="34" charset="-122"/>
-                <a:cs typeface="Calibri" pitchFamily="34" charset="-120"/>
-              </a:rPr>
-              <a:t>Individuals and firms own resources — Tom owns his printer and business, not the state.</a:t>
-            </a:r>
-            <a:endParaRPr lang="en-US" sz="1250" dirty="0"/>
-          </a:p>
-        </p:txBody>
-      </p:sp>
-      <p:sp>
-        <p:nvSpPr>
-          <p:cNvPr id="6" name="Shape 4"/>
-          <p:cNvSpPr/>
-          <p:nvPr/>
-        </p:nvSpPr>
-        <p:spPr>
-          <a:xfrm>
-            <a:off x="4448556" y="1828800"/>
-            <a:ext cx="3291840" cy="3108960"/>
-          </a:xfrm>
-          <a:prstGeom prst="roundRect">
-            <a:avLst>
-              <a:gd name="adj" fmla="val 3529"/>
-            </a:avLst>
-          </a:prstGeom>
-          <a:solidFill>
-            <a:srgbClr val="F4F5F7"/>
-          </a:solidFill>
-          <a:ln/>
-        </p:spPr>
-      </p:sp>
-      <p:sp>
-        <p:nvSpPr>
-          <p:cNvPr id="7" name="Text 5"/>
-          <p:cNvSpPr/>
-          <p:nvPr/>
-        </p:nvSpPr>
-        <p:spPr>
-          <a:xfrm>
-            <a:off x="4722876" y="2103120"/>
-            <a:ext cx="2743200" cy="548640"/>
-          </a:xfrm>
-          <a:prstGeom prst="rect">
-            <a:avLst/>
-          </a:prstGeom>
-          <a:noFill/>
-          <a:ln/>
-        </p:spPr>
-        <p:txBody>
-          <a:bodyPr wrap="square" rtlCol="0" anchor="ctr"/>
-          <a:lstStyle/>
-          <a:p>
-            <a:pPr indent="0" marL="0">
-              <a:buNone/>
-            </a:pPr>
-            <a:r>
-              <a:rPr lang="en-US" sz="1600" b="1" dirty="0">
-                <a:solidFill>
-                  <a:srgbClr val="1E2761"/>
-                </a:solidFill>
-                <a:latin typeface="Calibri" pitchFamily="34" charset="0"/>
-                <a:ea typeface="Calibri" pitchFamily="34" charset="-122"/>
-                <a:cs typeface="Calibri" pitchFamily="34" charset="-120"/>
-              </a:rPr>
-              <a:t>Profit motive</a:t>
-            </a:r>
-            <a:endParaRPr lang="en-US" sz="1600" dirty="0"/>
-          </a:p>
-        </p:txBody>
-      </p:sp>
-      <p:sp>
-        <p:nvSpPr>
-          <p:cNvPr id="8" name="Text 6"/>
-          <p:cNvSpPr/>
-          <p:nvPr/>
-        </p:nvSpPr>
-        <p:spPr>
-          <a:xfrm>
-            <a:off x="4722876" y="2697480"/>
-            <a:ext cx="2743200" cy="2011680"/>
-          </a:xfrm>
-          <a:prstGeom prst="rect">
-            <a:avLst/>
-          </a:prstGeom>
-          <a:noFill/>
-          <a:ln/>
-        </p:spPr>
-        <p:txBody>
-          <a:bodyPr wrap="square" rtlCol="0" anchor="t"/>
-          <a:lstStyle/>
-          <a:p>
-            <a:pPr indent="0" marL="0">
-              <a:lnSpc>
-                <a:spcPct val="125000"/>
-              </a:lnSpc>
-              <a:buNone/>
-            </a:pPr>
-            <a:r>
-              <a:rPr lang="en-US" sz="1250" dirty="0">
-                <a:solidFill>
-                  <a:srgbClr val="1A1A1A"/>
-                </a:solidFill>
-                <a:latin typeface="Calibri" pitchFamily="34" charset="0"/>
-                <a:ea typeface="Calibri" pitchFamily="34" charset="-122"/>
-                <a:cs typeface="Calibri" pitchFamily="34" charset="-120"/>
-              </a:rPr>
-              <a:t>Producers are driven by the goal of making a profit — that decides what gets made.</a:t>
-            </a:r>
-            <a:endParaRPr lang="en-US" sz="1250" dirty="0"/>
-          </a:p>
-        </p:txBody>
-      </p:sp>
-      <p:sp>
-        <p:nvSpPr>
-          <p:cNvPr id="9" name="Shape 7"/>
-          <p:cNvSpPr/>
-          <p:nvPr/>
-        </p:nvSpPr>
-        <p:spPr>
-          <a:xfrm>
-            <a:off x="8106156" y="1828800"/>
-            <a:ext cx="3291840" cy="3108960"/>
-          </a:xfrm>
-          <a:prstGeom prst="roundRect">
-            <a:avLst>
-              <a:gd name="adj" fmla="val 3529"/>
-            </a:avLst>
-          </a:prstGeom>
-          <a:solidFill>
-            <a:srgbClr val="F4F5F7"/>
-          </a:solidFill>
-          <a:ln/>
-        </p:spPr>
-      </p:sp>
-      <p:sp>
-        <p:nvSpPr>
-          <p:cNvPr id="10" name="Text 8"/>
-          <p:cNvSpPr/>
-          <p:nvPr/>
-        </p:nvSpPr>
-        <p:spPr>
-          <a:xfrm>
-            <a:off x="8380476" y="2103120"/>
-            <a:ext cx="2743200" cy="548640"/>
-          </a:xfrm>
-          <a:prstGeom prst="rect">
-            <a:avLst/>
-          </a:prstGeom>
-          <a:noFill/>
-          <a:ln/>
-        </p:spPr>
-        <p:txBody>
-          <a:bodyPr wrap="square" rtlCol="0" anchor="ctr"/>
-          <a:lstStyle/>
-          <a:p>
-            <a:pPr indent="0" marL="0">
-              <a:buNone/>
-            </a:pPr>
-            <a:r>
-              <a:rPr lang="en-US" sz="1600" b="1" dirty="0">
-                <a:solidFill>
-                  <a:srgbClr val="1E2761"/>
-                </a:solidFill>
-                <a:latin typeface="Calibri" pitchFamily="34" charset="0"/>
-                <a:ea typeface="Calibri" pitchFamily="34" charset="-122"/>
-                <a:cs typeface="Calibri" pitchFamily="34" charset="-120"/>
-              </a:rPr>
-              <a:t>Freedom of choice</a:t>
-            </a:r>
-            <a:endParaRPr lang="en-US" sz="1600" dirty="0"/>
-          </a:p>
-        </p:txBody>
-      </p:sp>
-      <p:sp>
-        <p:nvSpPr>
-          <p:cNvPr id="11" name="Text 9"/>
-          <p:cNvSpPr/>
-          <p:nvPr/>
-        </p:nvSpPr>
-        <p:spPr>
-          <a:xfrm>
-            <a:off x="8380476" y="2697480"/>
-            <a:ext cx="2743200" cy="2011680"/>
-          </a:xfrm>
-          <a:prstGeom prst="rect">
-            <a:avLst/>
-          </a:prstGeom>
-          <a:noFill/>
-          <a:ln/>
-        </p:spPr>
-        <p:txBody>
-          <a:bodyPr wrap="square" rtlCol="0" anchor="t"/>
-          <a:lstStyle/>
-          <a:p>
-            <a:pPr indent="0" marL="0">
-              <a:lnSpc>
-                <a:spcPct val="125000"/>
-              </a:lnSpc>
-              <a:buNone/>
-            </a:pPr>
-            <a:r>
-              <a:rPr lang="en-US" sz="1250" dirty="0">
-                <a:solidFill>
-                  <a:srgbClr val="1A1A1A"/>
-                </a:solidFill>
-                <a:latin typeface="Calibri" pitchFamily="34" charset="0"/>
-                <a:ea typeface="Calibri" pitchFamily="34" charset="-122"/>
-                <a:cs typeface="Calibri" pitchFamily="34" charset="-120"/>
-              </a:rPr>
-              <a:t>Consumers choose what to buy; producers choose what to sell and at what price.</a:t>
-            </a:r>
-            <a:endParaRPr lang="en-US" sz="1250" dirty="0"/>
+              <a:t>Revenue ROSE — elastic + price cut</a:t>
+            </a:r>
+            <a:endParaRPr lang="en-US" sz="1800" dirty="0"/>
           </a:p>
         </p:txBody>
       </p:sp>
@@ -4852,7 +6525,7 @@
         <p:spPr>
           <a:xfrm>
             <a:off x="640080" y="548640"/>
-            <a:ext cx="10881360" cy="731520"/>
+            <a:ext cx="10881360" cy="822960"/>
           </a:xfrm>
           <a:prstGeom prst="rect">
             <a:avLst/>
@@ -4868,7 +6541,7 @@
               <a:buNone/>
             </a:pPr>
             <a:r>
-              <a:rPr lang="en-US" sz="3000" b="1" dirty="0">
+              <a:rPr lang="en-US" sz="3200" b="1" dirty="0">
                 <a:solidFill>
                   <a:srgbClr val="1E2761"/>
                 </a:solidFill>
@@ -4876,83 +6549,22 @@
                 <a:ea typeface="Cambria" pitchFamily="34" charset="-122"/>
                 <a:cs typeface="Cambria" pitchFamily="34" charset="-120"/>
               </a:rPr>
-              <a:t>Characteristics of a market economy (2/2)</a:t>
-            </a:r>
-            <a:endParaRPr lang="en-US" sz="3000" dirty="0"/>
-          </a:p>
-        </p:txBody>
-      </p:sp>
-      <p:sp>
-        <p:nvSpPr>
-          <p:cNvPr id="3" name="Shape 1"/>
-          <p:cNvSpPr/>
-          <p:nvPr/>
-        </p:nvSpPr>
-        <p:spPr>
-          <a:xfrm>
-            <a:off x="2619756" y="1828800"/>
-            <a:ext cx="3291840" cy="3108960"/>
-          </a:xfrm>
-          <a:prstGeom prst="roundRect">
-            <a:avLst>
-              <a:gd name="adj" fmla="val 3529"/>
-            </a:avLst>
-          </a:prstGeom>
-          <a:solidFill>
-            <a:srgbClr val="F4F5F7"/>
-          </a:solidFill>
-          <a:ln/>
-        </p:spPr>
-      </p:sp>
-      <p:sp>
-        <p:nvSpPr>
-          <p:cNvPr id="4" name="Text 2"/>
-          <p:cNvSpPr/>
-          <p:nvPr/>
-        </p:nvSpPr>
-        <p:spPr>
-          <a:xfrm>
-            <a:off x="2894076" y="2103120"/>
-            <a:ext cx="2743200" cy="548640"/>
-          </a:xfrm>
-          <a:prstGeom prst="rect">
-            <a:avLst/>
-          </a:prstGeom>
-          <a:noFill/>
-          <a:ln/>
-        </p:spPr>
-        <p:txBody>
-          <a:bodyPr wrap="square" rtlCol="0" anchor="ctr"/>
-          <a:lstStyle/>
-          <a:p>
-            <a:pPr indent="0" marL="0">
-              <a:buNone/>
-            </a:pPr>
-            <a:r>
-              <a:rPr lang="en-US" sz="1600" b="1" dirty="0">
-                <a:solidFill>
-                  <a:srgbClr val="1E2761"/>
-                </a:solidFill>
-                <a:latin typeface="Calibri" pitchFamily="34" charset="0"/>
-                <a:ea typeface="Calibri" pitchFamily="34" charset="-122"/>
-                <a:cs typeface="Calibri" pitchFamily="34" charset="-120"/>
-              </a:rPr>
-              <a:t>Competition</a:t>
-            </a:r>
-            <a:endParaRPr lang="en-US" sz="1600" dirty="0"/>
-          </a:p>
-        </p:txBody>
-      </p:sp>
-      <p:sp>
-        <p:nvSpPr>
-          <p:cNvPr id="5" name="Text 3"/>
-          <p:cNvSpPr/>
-          <p:nvPr/>
-        </p:nvSpPr>
-        <p:spPr>
-          <a:xfrm>
-            <a:off x="2894076" y="2697480"/>
-            <a:ext cx="2743200" cy="2011680"/>
+              <a:t>Nobody's in charge — so how does it work?</a:t>
+            </a:r>
+            <a:endParaRPr lang="en-US" sz="3200" dirty="0"/>
+          </a:p>
+        </p:txBody>
+      </p:sp>
+      <p:sp>
+        <p:nvSpPr>
+          <p:cNvPr id="3" name="Text 1"/>
+          <p:cNvSpPr/>
+          <p:nvPr/>
+        </p:nvSpPr>
+        <p:spPr>
+          <a:xfrm>
+            <a:off x="822960" y="1828800"/>
+            <a:ext cx="9875520" cy="4114800"/>
           </a:xfrm>
           <a:prstGeom prst="rect">
             <a:avLst/>
@@ -4966,12 +6578,15 @@
           <a:p>
             <a:pPr indent="0" marL="0">
               <a:lnSpc>
-                <a:spcPct val="125000"/>
+                <a:spcPct val="130000"/>
               </a:lnSpc>
-              <a:buNone/>
-            </a:pPr>
-            <a:r>
-              <a:rPr lang="en-US" sz="1250" dirty="0">
+              <a:spcAft>
+                <a:spcPts val="1400"/>
+              </a:spcAft>
+              <a:buNone/>
+            </a:pPr>
+            <a:r>
+              <a:rPr lang="en-US" sz="1800" dirty="0">
                 <a:solidFill>
                   <a:srgbClr val="1A1A1A"/>
                 </a:solidFill>
@@ -4979,102 +6594,22 @@
                 <a:ea typeface="Calibri" pitchFamily="34" charset="-122"/>
                 <a:cs typeface="Calibri" pitchFamily="34" charset="-120"/>
               </a:rPr>
-              <a:t>Rival producers compete for customers, pushing prices down and quality/innovation up.</a:t>
-            </a:r>
-            <a:endParaRPr lang="en-US" sz="1250" dirty="0"/>
-          </a:p>
-        </p:txBody>
-      </p:sp>
-      <p:sp>
-        <p:nvSpPr>
-          <p:cNvPr id="6" name="Shape 4"/>
-          <p:cNvSpPr/>
-          <p:nvPr/>
-        </p:nvSpPr>
-        <p:spPr>
-          <a:xfrm>
-            <a:off x="6277356" y="1828800"/>
-            <a:ext cx="3291840" cy="3108960"/>
-          </a:xfrm>
-          <a:prstGeom prst="roundRect">
-            <a:avLst>
-              <a:gd name="adj" fmla="val 3529"/>
-            </a:avLst>
-          </a:prstGeom>
-          <a:solidFill>
-            <a:srgbClr val="F4F5F7"/>
-          </a:solidFill>
-          <a:ln/>
-        </p:spPr>
-      </p:sp>
-      <p:sp>
-        <p:nvSpPr>
-          <p:cNvPr id="7" name="Text 5"/>
-          <p:cNvSpPr/>
-          <p:nvPr/>
-        </p:nvSpPr>
-        <p:spPr>
-          <a:xfrm>
-            <a:off x="6551676" y="2103120"/>
-            <a:ext cx="2743200" cy="548640"/>
-          </a:xfrm>
-          <a:prstGeom prst="rect">
-            <a:avLst/>
-          </a:prstGeom>
-          <a:noFill/>
-          <a:ln/>
-        </p:spPr>
-        <p:txBody>
-          <a:bodyPr wrap="square" rtlCol="0" anchor="ctr"/>
-          <a:lstStyle/>
-          <a:p>
-            <a:pPr indent="0" marL="0">
-              <a:buNone/>
-            </a:pPr>
-            <a:r>
-              <a:rPr lang="en-US" sz="1600" b="1" dirty="0">
-                <a:solidFill>
-                  <a:srgbClr val="1E2761"/>
-                </a:solidFill>
-                <a:latin typeface="Calibri" pitchFamily="34" charset="0"/>
-                <a:ea typeface="Calibri" pitchFamily="34" charset="-122"/>
-                <a:cs typeface="Calibri" pitchFamily="34" charset="-120"/>
-              </a:rPr>
-              <a:t>Minimal government role</a:t>
-            </a:r>
-            <a:endParaRPr lang="en-US" sz="1600" dirty="0"/>
-          </a:p>
-        </p:txBody>
-      </p:sp>
-      <p:sp>
-        <p:nvSpPr>
-          <p:cNvPr id="8" name="Text 6"/>
-          <p:cNvSpPr/>
-          <p:nvPr/>
-        </p:nvSpPr>
-        <p:spPr>
-          <a:xfrm>
-            <a:off x="6551676" y="2697480"/>
-            <a:ext cx="2743200" cy="2011680"/>
-          </a:xfrm>
-          <a:prstGeom prst="rect">
-            <a:avLst/>
-          </a:prstGeom>
-          <a:noFill/>
-          <a:ln/>
-        </p:spPr>
-        <p:txBody>
-          <a:bodyPr wrap="square" rtlCol="0" anchor="t"/>
-          <a:lstStyle/>
+              <a:t>Nobody at Tom's Print Co has ever received a government order saying "make 60 grips this week, price them at $8."</a:t>
+            </a:r>
+            <a:endParaRPr lang="en-US" sz="1800" dirty="0"/>
+          </a:p>
           <a:p>
             <a:pPr indent="0" marL="0">
               <a:lnSpc>
-                <a:spcPct val="125000"/>
+                <a:spcPct val="130000"/>
               </a:lnSpc>
-              <a:buNone/>
-            </a:pPr>
-            <a:r>
-              <a:rPr lang="en-US" sz="1250" dirty="0">
+              <a:spcAft>
+                <a:spcPts val="1400"/>
+              </a:spcAft>
+              <a:buNone/>
+            </a:pPr>
+            <a:r>
+              <a:rPr lang="en-US" sz="1800" dirty="0">
                 <a:solidFill>
                   <a:srgbClr val="1A1A1A"/>
                 </a:solidFill>
@@ -5082,9 +6617,32 @@
                 <a:ea typeface="Calibri" pitchFamily="34" charset="-122"/>
                 <a:cs typeface="Calibri" pitchFamily="34" charset="-120"/>
               </a:rPr>
-              <a:t>The state mostly stays out of day-to-day production and pricing decisions.</a:t>
-            </a:r>
-            <a:endParaRPr lang="en-US" sz="1250" dirty="0"/>
+              <a:t>Nobody told the padel club how many courts to build.</a:t>
+            </a:r>
+            <a:endParaRPr lang="en-US" sz="1800" dirty="0"/>
+          </a:p>
+          <a:p>
+            <a:pPr indent="0" marL="0">
+              <a:lnSpc>
+                <a:spcPct val="130000"/>
+              </a:lnSpc>
+              <a:spcAft>
+                <a:spcPts val="1400"/>
+              </a:spcAft>
+              <a:buNone/>
+            </a:pPr>
+            <a:r>
+              <a:rPr lang="en-US" sz="1800" dirty="0">
+                <a:solidFill>
+                  <a:srgbClr val="1A1A1A"/>
+                </a:solidFill>
+                <a:latin typeface="Calibri" pitchFamily="34" charset="0"/>
+                <a:ea typeface="Calibri" pitchFamily="34" charset="-122"/>
+                <a:cs typeface="Calibri" pitchFamily="34" charset="-120"/>
+              </a:rPr>
+              <a:t>Yet roughly the right amount of stuff gets made, priced, and sold. How?</a:t>
+            </a:r>
+            <a:endParaRPr lang="en-US" sz="1800" dirty="0"/>
           </a:p>
         </p:txBody>
       </p:sp>
@@ -5153,7 +6711,7 @@
                 <a:ea typeface="Cambria" pitchFamily="34" charset="-122"/>
                 <a:cs typeface="Cambria" pitchFamily="34" charset="-120"/>
               </a:rPr>
-              <a:t>Now you try: market or planned?</a:t>
+              <a:t>The price mechanism</a:t>
             </a:r>
             <a:endParaRPr lang="en-US" sz="3200" dirty="0"/>
           </a:p>
@@ -5198,7 +6756,7 @@
                 <a:ea typeface="Calibri" pitchFamily="34" charset="-122"/>
                 <a:cs typeface="Calibri" pitchFamily="34" charset="-120"/>
               </a:rPr>
-              <a:t>Tom decides what to make based on what sells best.</a:t>
+              <a:t>In a market economic system, prices — driven by supply and demand — coordinate everything, with no central planner.</a:t>
             </a:r>
             <a:endParaRPr lang="en-US" sz="1800" dirty="0"/>
           </a:p>
@@ -5221,7 +6779,7 @@
                 <a:ea typeface="Calibri" pitchFamily="34" charset="-122"/>
                 <a:cs typeface="Calibri" pitchFamily="34" charset="-120"/>
               </a:rPr>
-              <a:t>A government official sets padel court prices for the whole country.</a:t>
+              <a:t>More people want grips than Tom is making → price gets bid up → that signals "make more, there's profit in it."</a:t>
             </a:r>
             <a:endParaRPr lang="en-US" sz="1800" dirty="0"/>
           </a:p>
@@ -5244,30 +6802,7 @@
                 <a:ea typeface="Calibri" pitchFamily="34" charset="-122"/>
                 <a:cs typeface="Calibri" pitchFamily="34" charset="-120"/>
               </a:rPr>
-              <a:t>Anyone can start a 3D-printing business if they think they can profit.</a:t>
-            </a:r>
-            <a:endParaRPr lang="en-US" sz="1800" dirty="0"/>
-          </a:p>
-          <a:p>
-            <a:pPr indent="0" marL="0">
-              <a:lnSpc>
-                <a:spcPct val="130000"/>
-              </a:lnSpc>
-              <a:spcAft>
-                <a:spcPts val="1400"/>
-              </a:spcAft>
-              <a:buNone/>
-            </a:pPr>
-            <a:r>
-              <a:rPr lang="en-US" sz="1800" dirty="0">
-                <a:solidFill>
-                  <a:srgbClr val="1A1A1A"/>
-                </a:solidFill>
-                <a:latin typeface="Calibri" pitchFamily="34" charset="0"/>
-                <a:ea typeface="Calibri" pitchFamily="34" charset="-122"/>
-                <a:cs typeface="Calibri" pitchFamily="34" charset="-120"/>
-              </a:rPr>
-              <a:t>The government owns every padel club and decides how many courts each town gets.</a:t>
+              <a:t>Millions of these tiny signals, constantly, are sometimes called the "invisible hand."</a:t>
             </a:r>
             <a:endParaRPr lang="en-US" sz="1800" dirty="0"/>
           </a:p>
@@ -5314,7 +6849,7 @@
         <p:spPr>
           <a:xfrm>
             <a:off x="640080" y="548640"/>
-            <a:ext cx="10881360" cy="822960"/>
+            <a:ext cx="10881360" cy="731520"/>
           </a:xfrm>
           <a:prstGeom prst="rect">
             <a:avLst/>
@@ -5330,7 +6865,7 @@
               <a:buNone/>
             </a:pPr>
             <a:r>
-              <a:rPr lang="en-US" sz="3200" b="1" dirty="0">
+              <a:rPr lang="en-US" sz="3000" b="1" dirty="0">
                 <a:solidFill>
                   <a:srgbClr val="1E2761"/>
                 </a:solidFill>
@@ -5338,22 +6873,83 @@
                 <a:ea typeface="Cambria" pitchFamily="34" charset="-122"/>
                 <a:cs typeface="Cambria" pitchFamily="34" charset="-120"/>
               </a:rPr>
-              <a:t>Advantages of the market system</a:t>
-            </a:r>
-            <a:endParaRPr lang="en-US" sz="3200" dirty="0"/>
-          </a:p>
-        </p:txBody>
-      </p:sp>
-      <p:sp>
-        <p:nvSpPr>
-          <p:cNvPr id="3" name="Text 1"/>
-          <p:cNvSpPr/>
-          <p:nvPr/>
-        </p:nvSpPr>
-        <p:spPr>
-          <a:xfrm>
-            <a:off x="822960" y="1828800"/>
-            <a:ext cx="9875520" cy="4114800"/>
+              <a:t>Three questions every economy answers</a:t>
+            </a:r>
+            <a:endParaRPr lang="en-US" sz="3000" dirty="0"/>
+          </a:p>
+        </p:txBody>
+      </p:sp>
+      <p:sp>
+        <p:nvSpPr>
+          <p:cNvPr id="3" name="Shape 1"/>
+          <p:cNvSpPr/>
+          <p:nvPr/>
+        </p:nvSpPr>
+        <p:spPr>
+          <a:xfrm>
+            <a:off x="790956" y="1828800"/>
+            <a:ext cx="3291840" cy="3108960"/>
+          </a:xfrm>
+          <a:prstGeom prst="roundRect">
+            <a:avLst>
+              <a:gd name="adj" fmla="val 3529"/>
+            </a:avLst>
+          </a:prstGeom>
+          <a:solidFill>
+            <a:srgbClr val="F4F5F7"/>
+          </a:solidFill>
+          <a:ln/>
+        </p:spPr>
+      </p:sp>
+      <p:sp>
+        <p:nvSpPr>
+          <p:cNvPr id="4" name="Text 2"/>
+          <p:cNvSpPr/>
+          <p:nvPr/>
+        </p:nvSpPr>
+        <p:spPr>
+          <a:xfrm>
+            <a:off x="1065276" y="2103120"/>
+            <a:ext cx="2743200" cy="548640"/>
+          </a:xfrm>
+          <a:prstGeom prst="rect">
+            <a:avLst/>
+          </a:prstGeom>
+          <a:noFill/>
+          <a:ln/>
+        </p:spPr>
+        <p:txBody>
+          <a:bodyPr wrap="square" rtlCol="0" anchor="ctr"/>
+          <a:lstStyle/>
+          <a:p>
+            <a:pPr indent="0" marL="0">
+              <a:buNone/>
+            </a:pPr>
+            <a:r>
+              <a:rPr lang="en-US" sz="1600" b="1" dirty="0">
+                <a:solidFill>
+                  <a:srgbClr val="1E2761"/>
+                </a:solidFill>
+                <a:latin typeface="Calibri" pitchFamily="34" charset="0"/>
+                <a:ea typeface="Calibri" pitchFamily="34" charset="-122"/>
+                <a:cs typeface="Calibri" pitchFamily="34" charset="-120"/>
+              </a:rPr>
+              <a:t>What to produce?</a:t>
+            </a:r>
+            <a:endParaRPr lang="en-US" sz="1600" dirty="0"/>
+          </a:p>
+        </p:txBody>
+      </p:sp>
+      <p:sp>
+        <p:nvSpPr>
+          <p:cNvPr id="5" name="Text 3"/>
+          <p:cNvSpPr/>
+          <p:nvPr/>
+        </p:nvSpPr>
+        <p:spPr>
+          <a:xfrm>
+            <a:off x="1065276" y="2697480"/>
+            <a:ext cx="2743200" cy="2011680"/>
           </a:xfrm>
           <a:prstGeom prst="rect">
             <a:avLst/>
@@ -5367,15 +6963,12 @@
           <a:p>
             <a:pPr indent="0" marL="0">
               <a:lnSpc>
-                <a:spcPct val="130000"/>
+                <a:spcPct val="125000"/>
               </a:lnSpc>
-              <a:spcAft>
-                <a:spcPts val="1400"/>
-              </a:spcAft>
-              <a:buNone/>
-            </a:pPr>
-            <a:r>
-              <a:rPr lang="en-US" sz="1800" dirty="0">
+              <a:buNone/>
+            </a:pPr>
+            <a:r>
+              <a:rPr lang="en-US" sz="1250" dirty="0">
                 <a:solidFill>
                   <a:srgbClr val="1A1A1A"/>
                 </a:solidFill>
@@ -5383,22 +6976,102 @@
                 <a:ea typeface="Calibri" pitchFamily="34" charset="-122"/>
                 <a:cs typeface="Calibri" pitchFamily="34" charset="-120"/>
               </a:rPr>
-              <a:t>Efficient allocation — resources flow toward what consumers actually want.</a:t>
-            </a:r>
-            <a:endParaRPr lang="en-US" sz="1800" dirty="0"/>
-          </a:p>
+              <a:t>Whatever earns a profit — signalled by what consumers are willing to pay for.</a:t>
+            </a:r>
+            <a:endParaRPr lang="en-US" sz="1250" dirty="0"/>
+          </a:p>
+        </p:txBody>
+      </p:sp>
+      <p:sp>
+        <p:nvSpPr>
+          <p:cNvPr id="6" name="Shape 4"/>
+          <p:cNvSpPr/>
+          <p:nvPr/>
+        </p:nvSpPr>
+        <p:spPr>
+          <a:xfrm>
+            <a:off x="4448556" y="1828800"/>
+            <a:ext cx="3291840" cy="3108960"/>
+          </a:xfrm>
+          <a:prstGeom prst="roundRect">
+            <a:avLst>
+              <a:gd name="adj" fmla="val 3529"/>
+            </a:avLst>
+          </a:prstGeom>
+          <a:solidFill>
+            <a:srgbClr val="F4F5F7"/>
+          </a:solidFill>
+          <a:ln/>
+        </p:spPr>
+      </p:sp>
+      <p:sp>
+        <p:nvSpPr>
+          <p:cNvPr id="7" name="Text 5"/>
+          <p:cNvSpPr/>
+          <p:nvPr/>
+        </p:nvSpPr>
+        <p:spPr>
+          <a:xfrm>
+            <a:off x="4722876" y="2103120"/>
+            <a:ext cx="2743200" cy="548640"/>
+          </a:xfrm>
+          <a:prstGeom prst="rect">
+            <a:avLst/>
+          </a:prstGeom>
+          <a:noFill/>
+          <a:ln/>
+        </p:spPr>
+        <p:txBody>
+          <a:bodyPr wrap="square" rtlCol="0" anchor="ctr"/>
+          <a:lstStyle/>
+          <a:p>
+            <a:pPr indent="0" marL="0">
+              <a:buNone/>
+            </a:pPr>
+            <a:r>
+              <a:rPr lang="en-US" sz="1600" b="1" dirty="0">
+                <a:solidFill>
+                  <a:srgbClr val="1E2761"/>
+                </a:solidFill>
+                <a:latin typeface="Calibri" pitchFamily="34" charset="0"/>
+                <a:ea typeface="Calibri" pitchFamily="34" charset="-122"/>
+                <a:cs typeface="Calibri" pitchFamily="34" charset="-120"/>
+              </a:rPr>
+              <a:t>How to produce?</a:t>
+            </a:r>
+            <a:endParaRPr lang="en-US" sz="1600" dirty="0"/>
+          </a:p>
+        </p:txBody>
+      </p:sp>
+      <p:sp>
+        <p:nvSpPr>
+          <p:cNvPr id="8" name="Text 6"/>
+          <p:cNvSpPr/>
+          <p:nvPr/>
+        </p:nvSpPr>
+        <p:spPr>
+          <a:xfrm>
+            <a:off x="4722876" y="2697480"/>
+            <a:ext cx="2743200" cy="2011680"/>
+          </a:xfrm>
+          <a:prstGeom prst="rect">
+            <a:avLst/>
+          </a:prstGeom>
+          <a:noFill/>
+          <a:ln/>
+        </p:spPr>
+        <p:txBody>
+          <a:bodyPr wrap="square" rtlCol="0" anchor="t"/>
+          <a:lstStyle/>
           <a:p>
             <a:pPr indent="0" marL="0">
               <a:lnSpc>
-                <a:spcPct val="130000"/>
+                <a:spcPct val="125000"/>
               </a:lnSpc>
-              <a:spcAft>
-                <a:spcPts val="1400"/>
-              </a:spcAft>
-              <a:buNone/>
-            </a:pPr>
-            <a:r>
-              <a:rPr lang="en-US" sz="1800" dirty="0">
+              <a:buNone/>
+            </a:pPr>
+            <a:r>
+              <a:rPr lang="en-US" sz="1250" dirty="0">
                 <a:solidFill>
                   <a:srgbClr val="1A1A1A"/>
                 </a:solidFill>
@@ -5406,22 +7079,102 @@
                 <a:ea typeface="Calibri" pitchFamily="34" charset="-122"/>
                 <a:cs typeface="Calibri" pitchFamily="34" charset="-120"/>
               </a:rPr>
-              <a:t>Consumer choice — many competing products, not one state-approved option.</a:t>
-            </a:r>
-            <a:endParaRPr lang="en-US" sz="1800" dirty="0"/>
-          </a:p>
+              <a:t>However keeps costs lowest — competition punishes wasteful producers with lower profit.</a:t>
+            </a:r>
+            <a:endParaRPr lang="en-US" sz="1250" dirty="0"/>
+          </a:p>
+        </p:txBody>
+      </p:sp>
+      <p:sp>
+        <p:nvSpPr>
+          <p:cNvPr id="9" name="Shape 7"/>
+          <p:cNvSpPr/>
+          <p:nvPr/>
+        </p:nvSpPr>
+        <p:spPr>
+          <a:xfrm>
+            <a:off x="8106156" y="1828800"/>
+            <a:ext cx="3291840" cy="3108960"/>
+          </a:xfrm>
+          <a:prstGeom prst="roundRect">
+            <a:avLst>
+              <a:gd name="adj" fmla="val 3529"/>
+            </a:avLst>
+          </a:prstGeom>
+          <a:solidFill>
+            <a:srgbClr val="F4F5F7"/>
+          </a:solidFill>
+          <a:ln/>
+        </p:spPr>
+      </p:sp>
+      <p:sp>
+        <p:nvSpPr>
+          <p:cNvPr id="10" name="Text 8"/>
+          <p:cNvSpPr/>
+          <p:nvPr/>
+        </p:nvSpPr>
+        <p:spPr>
+          <a:xfrm>
+            <a:off x="8380476" y="2103120"/>
+            <a:ext cx="2743200" cy="548640"/>
+          </a:xfrm>
+          <a:prstGeom prst="rect">
+            <a:avLst/>
+          </a:prstGeom>
+          <a:noFill/>
+          <a:ln/>
+        </p:spPr>
+        <p:txBody>
+          <a:bodyPr wrap="square" rtlCol="0" anchor="ctr"/>
+          <a:lstStyle/>
+          <a:p>
+            <a:pPr indent="0" marL="0">
+              <a:buNone/>
+            </a:pPr>
+            <a:r>
+              <a:rPr lang="en-US" sz="1600" b="1" dirty="0">
+                <a:solidFill>
+                  <a:srgbClr val="1E2761"/>
+                </a:solidFill>
+                <a:latin typeface="Calibri" pitchFamily="34" charset="0"/>
+                <a:ea typeface="Calibri" pitchFamily="34" charset="-122"/>
+                <a:cs typeface="Calibri" pitchFamily="34" charset="-120"/>
+              </a:rPr>
+              <a:t>For whom?</a:t>
+            </a:r>
+            <a:endParaRPr lang="en-US" sz="1600" dirty="0"/>
+          </a:p>
+        </p:txBody>
+      </p:sp>
+      <p:sp>
+        <p:nvSpPr>
+          <p:cNvPr id="11" name="Text 9"/>
+          <p:cNvSpPr/>
+          <p:nvPr/>
+        </p:nvSpPr>
+        <p:spPr>
+          <a:xfrm>
+            <a:off x="8380476" y="2697480"/>
+            <a:ext cx="2743200" cy="2011680"/>
+          </a:xfrm>
+          <a:prstGeom prst="rect">
+            <a:avLst/>
+          </a:prstGeom>
+          <a:noFill/>
+          <a:ln/>
+        </p:spPr>
+        <p:txBody>
+          <a:bodyPr wrap="square" rtlCol="0" anchor="t"/>
+          <a:lstStyle/>
           <a:p>
             <a:pPr indent="0" marL="0">
               <a:lnSpc>
-                <a:spcPct val="130000"/>
+                <a:spcPct val="125000"/>
               </a:lnSpc>
-              <a:spcAft>
-                <a:spcPts val="1400"/>
-              </a:spcAft>
-              <a:buNone/>
-            </a:pPr>
-            <a:r>
-              <a:rPr lang="en-US" sz="1800" dirty="0">
+              <a:buNone/>
+            </a:pPr>
+            <a:r>
+              <a:rPr lang="en-US" sz="1250" dirty="0">
                 <a:solidFill>
                   <a:srgbClr val="1A1A1A"/>
                 </a:solidFill>
@@ -5429,32 +7182,9 @@
                 <a:ea typeface="Calibri" pitchFamily="34" charset="-122"/>
                 <a:cs typeface="Calibri" pitchFamily="34" charset="-120"/>
               </a:rPr>
-              <a:t>Incentive to innovate — competition rewards cutting costs or building something better.</a:t>
-            </a:r>
-            <a:endParaRPr lang="en-US" sz="1800" dirty="0"/>
-          </a:p>
-          <a:p>
-            <a:pPr indent="0" marL="0">
-              <a:lnSpc>
-                <a:spcPct val="130000"/>
-              </a:lnSpc>
-              <a:spcAft>
-                <a:spcPts val="1400"/>
-              </a:spcAft>
-              <a:buNone/>
-            </a:pPr>
-            <a:r>
-              <a:rPr lang="en-US" sz="1800" dirty="0">
-                <a:solidFill>
-                  <a:srgbClr val="1A1A1A"/>
-                </a:solidFill>
-                <a:latin typeface="Calibri" pitchFamily="34" charset="0"/>
-                <a:ea typeface="Calibri" pitchFamily="34" charset="-122"/>
-                <a:cs typeface="Calibri" pitchFamily="34" charset="-120"/>
-              </a:rPr>
-              <a:t>No costly bureaucracy — no army of planners needed to set production levels.</a:t>
-            </a:r>
-            <a:endParaRPr lang="en-US" sz="1800" dirty="0"/>
+              <a:t>Whoever is willing AND able to pay the market price — not need, lottery, or the state.</a:t>
+            </a:r>
+            <a:endParaRPr lang="en-US" sz="1250" dirty="0"/>
           </a:p>
         </p:txBody>
       </p:sp>
